--- a/ppt-studio/examples/sample-ir.pptx
+++ b/ppt-studio/examples/sample-ir.pptx
@@ -5844,7 +5844,7 @@
             <a:avLst/>
           </a:prstGeom>
           <a:solidFill>
-            <a:srgbClr val="142A4D"/>
+            <a:srgbClr val="F3F5F8"/>
           </a:solidFill>
           <a:ln>
             <a:noFill/>
@@ -5881,8 +5881,8 @@
         </p:nvSpPr>
         <p:spPr>
           <a:xfrm>
-            <a:off x="548626" y="2468880"/>
-            <a:ext cx="11094443" cy="822960"/>
+            <a:off x="548626" y="2057400"/>
+            <a:ext cx="11094443" cy="1371600"/>
           </a:xfrm>
           <a:prstGeom prst="rect">
             <a:avLst/>
@@ -5901,7 +5901,7 @@
               </a:lnSpc>
             </a:pPr>
             <a:r>
-              <a:rPr sz="5400" b="1">
+              <a:rPr sz="7200" b="1">
                 <a:solidFill>
                   <a:srgbClr val="E8833A"/>
                 </a:solidFill>
@@ -5916,13 +5916,57 @@
       </p:sp>
       <p:sp>
         <p:nvSpPr>
-          <p:cNvPr id="4" name="TextBox 3"/>
+          <p:cNvPr id="4" name="Rectangle 3"/>
+          <p:cNvSpPr/>
+          <p:nvPr/>
+        </p:nvSpPr>
+        <p:spPr>
+          <a:xfrm>
+            <a:off x="548626" y="3566160"/>
+            <a:ext cx="822960" cy="57150"/>
+          </a:xfrm>
+          <a:prstGeom prst="rect">
+            <a:avLst/>
+          </a:prstGeom>
+          <a:solidFill>
+            <a:srgbClr val="142A4D"/>
+          </a:solidFill>
+          <a:ln>
+            <a:noFill/>
+          </a:ln>
+          <a:effectLst/>
+        </p:spPr>
+        <p:style>
+          <a:lnRef idx="1">
+            <a:schemeClr val="accent1"/>
+          </a:lnRef>
+          <a:fillRef idx="3">
+            <a:schemeClr val="accent1"/>
+          </a:fillRef>
+          <a:effectRef idx="2">
+            <a:schemeClr val="accent1"/>
+          </a:effectRef>
+          <a:fontRef idx="minor">
+            <a:schemeClr val="lt1"/>
+          </a:fontRef>
+        </p:style>
+        <p:txBody>
+          <a:bodyPr rtlCol="0" anchor="ctr"/>
+          <a:lstStyle/>
+          <a:p>
+            <a:pPr algn="ctr"/>
+          </a:p>
+        </p:txBody>
+      </p:sp>
+      <p:sp>
+        <p:nvSpPr>
+          <p:cNvPr id="5" name="TextBox 4"/>
           <p:cNvSpPr txBox="1"/>
           <p:nvPr/>
         </p:nvSpPr>
         <p:spPr>
           <a:xfrm>
-            <a:off x="548626" y="3429000"/>
+            <a:off x="548626" y="3840480"/>
             <a:ext cx="11094443" cy="822960"/>
           </a:xfrm>
           <a:prstGeom prst="rect">
@@ -5944,7 +5988,7 @@
             <a:r>
               <a:rPr sz="3200" b="1">
                 <a:solidFill>
-                  <a:srgbClr val="FFFFFF"/>
+                  <a:srgbClr val="142A4D"/>
                 </a:solidFill>
                 <a:latin typeface="Pretendard"/>
                 <a:ea typeface="Pretendard"/>
@@ -6341,6 +6385,17 @@
               </a:spcAft>
             </a:pPr>
             <a:r>
+              <a:rPr sz="1800" b="1">
+                <a:solidFill>
+                  <a:srgbClr val="142A4D"/>
+                </a:solidFill>
+                <a:latin typeface="Pretendard"/>
+                <a:ea typeface="Pretendard"/>
+                <a:cs typeface="Pretendard"/>
+              </a:rPr>
+              <a:t>•  회신 지연  </a:t>
+            </a:r>
+            <a:r>
               <a:rPr sz="1800" b="0">
                 <a:solidFill>
                   <a:srgbClr val="1E2329"/>
@@ -6349,7 +6404,7 @@
                 <a:ea typeface="Pretendard"/>
                 <a:cs typeface="Pretendard"/>
               </a:rPr>
-              <a:t>•  견적 요청의 38%가 회신 지연으로 이탈</a:t>
+              <a:t>견적 요청의 38%가 이탈</a:t>
             </a:r>
           </a:p>
           <a:p>
@@ -6362,6 +6417,17 @@
               </a:spcAft>
             </a:pPr>
             <a:r>
+              <a:rPr sz="1800" b="1">
+                <a:solidFill>
+                  <a:srgbClr val="142A4D"/>
+                </a:solidFill>
+                <a:latin typeface="Pretendard"/>
+                <a:ea typeface="Pretendard"/>
+                <a:cs typeface="Pretendard"/>
+              </a:rPr>
+              <a:t>•  수작업 처리  </a:t>
+            </a:r>
+            <a:r>
               <a:rPr sz="1800" b="0">
                 <a:solidFill>
                   <a:srgbClr val="1E2329"/>
@@ -6370,7 +6436,7 @@
                 <a:ea typeface="Pretendard"/>
                 <a:cs typeface="Pretendard"/>
               </a:rPr>
-              <a:t>•  담당자 1인이 월 120건을 수작업 처리</a:t>
+              <a:t>담당자 1인 월 120건</a:t>
             </a:r>
           </a:p>
           <a:p>
@@ -6383,6 +6449,17 @@
               </a:spcAft>
             </a:pPr>
             <a:r>
+              <a:rPr sz="1800" b="1">
+                <a:solidFill>
+                  <a:srgbClr val="142A4D"/>
+                </a:solidFill>
+                <a:latin typeface="Pretendard"/>
+                <a:ea typeface="Pretendard"/>
+                <a:cs typeface="Pretendard"/>
+              </a:rPr>
+              <a:t>•  기존 ERP  </a:t>
+            </a:r>
+            <a:r>
               <a:rPr sz="1800" b="0">
                 <a:solidFill>
                   <a:srgbClr val="1E2329"/>
@@ -6391,7 +6468,7 @@
                 <a:ea typeface="Pretendard"/>
                 <a:cs typeface="Pretendard"/>
               </a:rPr>
-              <a:t>•  기존 ERP는 견적 자동화 기능 부재</a:t>
+              <a:t>견적 자동화 기능 부재</a:t>
             </a:r>
           </a:p>
         </p:txBody>
@@ -6494,7 +6571,7 @@
                 <a:ea typeface="Pretendard"/>
                 <a:cs typeface="Pretendard"/>
               </a:rPr>
-              <a:t>03 트랙션</a:t>
+              <a:t>02 솔루션</a:t>
             </a:r>
           </a:p>
         </p:txBody>
@@ -6535,7 +6612,7 @@
                 <a:ea typeface="Pretendard"/>
                 <a:cs typeface="Pretendard"/>
               </a:rPr>
-              <a:t>출시 9개월 만에 유료 고객 42곳 확보</a:t>
+              <a:t>도입 전후 견적 프로세스</a:t>
             </a:r>
           </a:p>
         </p:txBody>
@@ -6620,7 +6697,7 @@
                 <a:ea typeface="Pretendard"/>
                 <a:cs typeface="Pretendard"/>
               </a:rPr>
-              <a:t>출처: 가상 데이터</a:t>
+              <a:t/>
             </a:r>
           </a:p>
         </p:txBody>
@@ -6675,7 +6752,92 @@
         <p:spPr>
           <a:xfrm>
             <a:off x="548626" y="1851660"/>
-            <a:ext cx="2567870" cy="2926080"/>
+            <a:ext cx="5364341" cy="548640"/>
+          </a:xfrm>
+          <a:prstGeom prst="rect">
+            <a:avLst/>
+          </a:prstGeom>
+          <a:solidFill>
+            <a:srgbClr val="6B7280"/>
+          </a:solidFill>
+          <a:ln>
+            <a:noFill/>
+          </a:ln>
+          <a:effectLst/>
+        </p:spPr>
+        <p:style>
+          <a:lnRef idx="1">
+            <a:schemeClr val="accent1"/>
+          </a:lnRef>
+          <a:fillRef idx="3">
+            <a:schemeClr val="accent1"/>
+          </a:fillRef>
+          <a:effectRef idx="2">
+            <a:schemeClr val="accent1"/>
+          </a:effectRef>
+          <a:fontRef idx="minor">
+            <a:schemeClr val="lt1"/>
+          </a:fontRef>
+        </p:style>
+        <p:txBody>
+          <a:bodyPr rtlCol="0" anchor="ctr"/>
+          <a:lstStyle/>
+          <a:p>
+            <a:pPr algn="ctr"/>
+          </a:p>
+        </p:txBody>
+      </p:sp>
+      <p:sp>
+        <p:nvSpPr>
+          <p:cNvPr id="9" name="TextBox 8"/>
+          <p:cNvSpPr txBox="1"/>
+          <p:nvPr/>
+        </p:nvSpPr>
+        <p:spPr>
+          <a:xfrm>
+            <a:off x="777226" y="1851660"/>
+            <a:ext cx="4907141" cy="548640"/>
+          </a:xfrm>
+          <a:prstGeom prst="rect">
+            <a:avLst/>
+          </a:prstGeom>
+          <a:noFill/>
+        </p:spPr>
+        <p:txBody>
+          <a:bodyPr wrap="square" anchor="ctr" lIns="0" rIns="0" tIns="0" bIns="0">
+            <a:spAutoFit/>
+          </a:bodyPr>
+          <a:lstStyle/>
+          <a:p>
+            <a:pPr algn="l">
+              <a:lnSpc>
+                <a:spcPct val="115000"/>
+              </a:lnSpc>
+            </a:pPr>
+            <a:r>
+              <a:rPr sz="1800" b="1">
+                <a:solidFill>
+                  <a:srgbClr val="FFFFFF"/>
+                </a:solidFill>
+                <a:latin typeface="Pretendard"/>
+                <a:ea typeface="Pretendard"/>
+                <a:cs typeface="Pretendard"/>
+              </a:rPr>
+              <a:t>도입 전</a:t>
+            </a:r>
+          </a:p>
+        </p:txBody>
+      </p:sp>
+      <p:sp>
+        <p:nvSpPr>
+          <p:cNvPr id="10" name="Rectangle 9"/>
+          <p:cNvSpPr/>
+          <p:nvPr/>
+        </p:nvSpPr>
+        <p:spPr>
+          <a:xfrm>
+            <a:off x="548626" y="2400300"/>
+            <a:ext cx="5364341" cy="3771900"/>
           </a:xfrm>
           <a:prstGeom prst="rect">
             <a:avLst/>
@@ -6712,58 +6874,14 @@
       </p:sp>
       <p:sp>
         <p:nvSpPr>
-          <p:cNvPr id="9" name="Rectangle 8"/>
-          <p:cNvSpPr/>
-          <p:nvPr/>
-        </p:nvSpPr>
-        <p:spPr>
-          <a:xfrm>
-            <a:off x="548626" y="1851660"/>
-            <a:ext cx="2567870" cy="57150"/>
-          </a:xfrm>
-          <a:prstGeom prst="rect">
-            <a:avLst/>
-          </a:prstGeom>
-          <a:solidFill>
-            <a:srgbClr val="E8833A"/>
-          </a:solidFill>
-          <a:ln>
-            <a:noFill/>
-          </a:ln>
-          <a:effectLst/>
-        </p:spPr>
-        <p:style>
-          <a:lnRef idx="1">
-            <a:schemeClr val="accent1"/>
-          </a:lnRef>
-          <a:fillRef idx="3">
-            <a:schemeClr val="accent1"/>
-          </a:fillRef>
-          <a:effectRef idx="2">
-            <a:schemeClr val="accent1"/>
-          </a:effectRef>
-          <a:fontRef idx="minor">
-            <a:schemeClr val="lt1"/>
-          </a:fontRef>
-        </p:style>
-        <p:txBody>
-          <a:bodyPr rtlCol="0" anchor="ctr"/>
-          <a:lstStyle/>
-          <a:p>
-            <a:pPr algn="ctr"/>
-          </a:p>
-        </p:txBody>
-      </p:sp>
-      <p:sp>
-        <p:nvSpPr>
-          <p:cNvPr id="10" name="TextBox 9"/>
+          <p:cNvPr id="11" name="TextBox 10"/>
           <p:cNvSpPr txBox="1"/>
           <p:nvPr/>
         </p:nvSpPr>
         <p:spPr>
           <a:xfrm>
-            <a:off x="822946" y="2125980"/>
-            <a:ext cx="2019230" cy="1170432"/>
+            <a:off x="822946" y="2674620"/>
+            <a:ext cx="4815701" cy="3314700"/>
           </a:xfrm>
           <a:prstGeom prst="rect">
             <a:avLst/>
@@ -6780,50 +6898,12 @@
               <a:lnSpc>
                 <a:spcPct val="115000"/>
               </a:lnSpc>
+              <a:spcAft>
+                <a:spcPts val="960"/>
+              </a:spcAft>
             </a:pPr>
             <a:r>
-              <a:rPr sz="4000" b="1">
-                <a:solidFill>
-                  <a:srgbClr val="142A4D"/>
-                </a:solidFill>
-                <a:latin typeface="Pretendard"/>
-                <a:ea typeface="Pretendard"/>
-                <a:cs typeface="Pretendard"/>
-              </a:rPr>
-              <a:t>42곳</a:t>
-            </a:r>
-          </a:p>
-        </p:txBody>
-      </p:sp>
-      <p:sp>
-        <p:nvSpPr>
-          <p:cNvPr id="11" name="TextBox 10"/>
-          <p:cNvSpPr txBox="1"/>
-          <p:nvPr/>
-        </p:nvSpPr>
-        <p:spPr>
-          <a:xfrm>
-            <a:off x="822946" y="3314700"/>
-            <a:ext cx="2019230" cy="438912"/>
-          </a:xfrm>
-          <a:prstGeom prst="rect">
-            <a:avLst/>
-          </a:prstGeom>
-          <a:noFill/>
-        </p:spPr>
-        <p:txBody>
-          <a:bodyPr wrap="square" anchor="t" lIns="0" rIns="0" tIns="0" bIns="0">
-            <a:spAutoFit/>
-          </a:bodyPr>
-          <a:lstStyle/>
-          <a:p>
-            <a:pPr algn="l">
-              <a:lnSpc>
-                <a:spcPct val="115000"/>
-              </a:lnSpc>
-            </a:pPr>
-            <a:r>
-              <a:rPr sz="1600" b="1">
+              <a:rPr sz="1600" b="0">
                 <a:solidFill>
                   <a:srgbClr val="1E2329"/>
                 </a:solidFill>
@@ -6831,21 +6911,107 @@
                 <a:ea typeface="Pretendard"/>
                 <a:cs typeface="Pretendard"/>
               </a:rPr>
-              <a:t>유료 고객</a:t>
-            </a:r>
-          </a:p>
-        </p:txBody>
-      </p:sp>
-      <p:sp>
-        <p:nvSpPr>
-          <p:cNvPr id="12" name="TextBox 11"/>
+              <a:t>•  엑셀 단가표 수동 조회</a:t>
+            </a:r>
+          </a:p>
+          <a:p>
+            <a:pPr algn="l">
+              <a:lnSpc>
+                <a:spcPct val="115000"/>
+              </a:lnSpc>
+              <a:spcAft>
+                <a:spcPts val="960"/>
+              </a:spcAft>
+            </a:pPr>
+            <a:r>
+              <a:rPr sz="1600" b="0">
+                <a:solidFill>
+                  <a:srgbClr val="1E2329"/>
+                </a:solidFill>
+                <a:latin typeface="Pretendard"/>
+                <a:ea typeface="Pretendard"/>
+                <a:cs typeface="Pretendard"/>
+              </a:rPr>
+              <a:t>•  담당자 승인 대기 2일</a:t>
+            </a:r>
+          </a:p>
+          <a:p>
+            <a:pPr algn="l">
+              <a:lnSpc>
+                <a:spcPct val="115000"/>
+              </a:lnSpc>
+              <a:spcAft>
+                <a:spcPts val="960"/>
+              </a:spcAft>
+            </a:pPr>
+            <a:r>
+              <a:rPr sz="1600" b="0">
+                <a:solidFill>
+                  <a:srgbClr val="1E2329"/>
+                </a:solidFill>
+                <a:latin typeface="Pretendard"/>
+                <a:ea typeface="Pretendard"/>
+                <a:cs typeface="Pretendard"/>
+              </a:rPr>
+              <a:t>•  회신 평균 5일</a:t>
+            </a:r>
+          </a:p>
+        </p:txBody>
+      </p:sp>
+      <p:sp>
+        <p:nvSpPr>
+          <p:cNvPr id="12" name="Rectangle 11"/>
+          <p:cNvSpPr/>
+          <p:nvPr/>
+        </p:nvSpPr>
+        <p:spPr>
+          <a:xfrm>
+            <a:off x="6278727" y="1851660"/>
+            <a:ext cx="5364341" cy="548640"/>
+          </a:xfrm>
+          <a:prstGeom prst="rect">
+            <a:avLst/>
+          </a:prstGeom>
+          <a:solidFill>
+            <a:srgbClr val="142A4D"/>
+          </a:solidFill>
+          <a:ln>
+            <a:noFill/>
+          </a:ln>
+          <a:effectLst/>
+        </p:spPr>
+        <p:style>
+          <a:lnRef idx="1">
+            <a:schemeClr val="accent1"/>
+          </a:lnRef>
+          <a:fillRef idx="3">
+            <a:schemeClr val="accent1"/>
+          </a:fillRef>
+          <a:effectRef idx="2">
+            <a:schemeClr val="accent1"/>
+          </a:effectRef>
+          <a:fontRef idx="minor">
+            <a:schemeClr val="lt1"/>
+          </a:fontRef>
+        </p:style>
+        <p:txBody>
+          <a:bodyPr rtlCol="0" anchor="ctr"/>
+          <a:lstStyle/>
+          <a:p>
+            <a:pPr algn="ctr"/>
+          </a:p>
+        </p:txBody>
+      </p:sp>
+      <p:sp>
+        <p:nvSpPr>
+          <p:cNvPr id="13" name="TextBox 12"/>
           <p:cNvSpPr txBox="1"/>
           <p:nvPr/>
         </p:nvSpPr>
         <p:spPr>
           <a:xfrm>
-            <a:off x="822946" y="3782872"/>
-            <a:ext cx="2019230" cy="877824"/>
+            <a:off x="6507327" y="1851660"/>
+            <a:ext cx="4907141" cy="548640"/>
           </a:xfrm>
           <a:prstGeom prst="rect">
             <a:avLst/>
@@ -6853,7 +7019,7 @@
           <a:noFill/>
         </p:spPr>
         <p:txBody>
-          <a:bodyPr wrap="square" anchor="t" lIns="0" rIns="0" tIns="0" bIns="0">
+          <a:bodyPr wrap="square" anchor="ctr" lIns="0" rIns="0" tIns="0" bIns="0">
             <a:spAutoFit/>
           </a:bodyPr>
           <a:lstStyle/>
@@ -6864,29 +7030,29 @@
               </a:lnSpc>
             </a:pPr>
             <a:r>
-              <a:rPr sz="1200" b="0">
+              <a:rPr sz="1800" b="1">
                 <a:solidFill>
-                  <a:srgbClr val="6B7280"/>
+                  <a:srgbClr val="FFFFFF"/>
                 </a:solidFill>
                 <a:latin typeface="Pretendard"/>
                 <a:ea typeface="Pretendard"/>
                 <a:cs typeface="Pretendard"/>
               </a:rPr>
-              <a:t>제조사 B2B 구독</a:t>
-            </a:r>
-          </a:p>
-        </p:txBody>
-      </p:sp>
-      <p:sp>
-        <p:nvSpPr>
-          <p:cNvPr id="13" name="Rectangle 12"/>
+              <a:t>도입 후</a:t>
+            </a:r>
+          </a:p>
+        </p:txBody>
+      </p:sp>
+      <p:sp>
+        <p:nvSpPr>
+          <p:cNvPr id="14" name="Rectangle 13"/>
           <p:cNvSpPr/>
           <p:nvPr/>
         </p:nvSpPr>
         <p:spPr>
           <a:xfrm>
-            <a:off x="3390816" y="1851660"/>
-            <a:ext cx="2567870" cy="2926080"/>
+            <a:off x="6278727" y="2400300"/>
+            <a:ext cx="5364341" cy="3771900"/>
           </a:xfrm>
           <a:prstGeom prst="rect">
             <a:avLst/>
@@ -6923,58 +7089,14 @@
       </p:sp>
       <p:sp>
         <p:nvSpPr>
-          <p:cNvPr id="14" name="Rectangle 13"/>
-          <p:cNvSpPr/>
-          <p:nvPr/>
-        </p:nvSpPr>
-        <p:spPr>
-          <a:xfrm>
-            <a:off x="3390816" y="1851660"/>
-            <a:ext cx="2567870" cy="57150"/>
-          </a:xfrm>
-          <a:prstGeom prst="rect">
-            <a:avLst/>
-          </a:prstGeom>
-          <a:solidFill>
-            <a:srgbClr val="E8833A"/>
-          </a:solidFill>
-          <a:ln>
-            <a:noFill/>
-          </a:ln>
-          <a:effectLst/>
-        </p:spPr>
-        <p:style>
-          <a:lnRef idx="1">
-            <a:schemeClr val="accent1"/>
-          </a:lnRef>
-          <a:fillRef idx="3">
-            <a:schemeClr val="accent1"/>
-          </a:fillRef>
-          <a:effectRef idx="2">
-            <a:schemeClr val="accent1"/>
-          </a:effectRef>
-          <a:fontRef idx="minor">
-            <a:schemeClr val="lt1"/>
-          </a:fontRef>
-        </p:style>
-        <p:txBody>
-          <a:bodyPr rtlCol="0" anchor="ctr"/>
-          <a:lstStyle/>
-          <a:p>
-            <a:pPr algn="ctr"/>
-          </a:p>
-        </p:txBody>
-      </p:sp>
-      <p:sp>
-        <p:nvSpPr>
           <p:cNvPr id="15" name="TextBox 14"/>
           <p:cNvSpPr txBox="1"/>
           <p:nvPr/>
         </p:nvSpPr>
         <p:spPr>
           <a:xfrm>
-            <a:off x="3665136" y="2125980"/>
-            <a:ext cx="2019230" cy="1170432"/>
+            <a:off x="6553047" y="2674620"/>
+            <a:ext cx="4815701" cy="3314700"/>
           </a:xfrm>
           <a:prstGeom prst="rect">
             <a:avLst/>
@@ -6991,50 +7113,12 @@
               <a:lnSpc>
                 <a:spcPct val="115000"/>
               </a:lnSpc>
+              <a:spcAft>
+                <a:spcPts val="960"/>
+              </a:spcAft>
             </a:pPr>
             <a:r>
-              <a:rPr sz="4000" b="1">
-                <a:solidFill>
-                  <a:srgbClr val="142A4D"/>
-                </a:solidFill>
-                <a:latin typeface="Pretendard"/>
-                <a:ea typeface="Pretendard"/>
-                <a:cs typeface="Pretendard"/>
-              </a:rPr>
-              <a:t>4.1억</a:t>
-            </a:r>
-          </a:p>
-        </p:txBody>
-      </p:sp>
-      <p:sp>
-        <p:nvSpPr>
-          <p:cNvPr id="16" name="TextBox 15"/>
-          <p:cNvSpPr txBox="1"/>
-          <p:nvPr/>
-        </p:nvSpPr>
-        <p:spPr>
-          <a:xfrm>
-            <a:off x="3665136" y="3314700"/>
-            <a:ext cx="2019230" cy="438912"/>
-          </a:xfrm>
-          <a:prstGeom prst="rect">
-            <a:avLst/>
-          </a:prstGeom>
-          <a:noFill/>
-        </p:spPr>
-        <p:txBody>
-          <a:bodyPr wrap="square" anchor="t" lIns="0" rIns="0" tIns="0" bIns="0">
-            <a:spAutoFit/>
-          </a:bodyPr>
-          <a:lstStyle/>
-          <a:p>
-            <a:pPr algn="l">
-              <a:lnSpc>
-                <a:spcPct val="115000"/>
-              </a:lnSpc>
-            </a:pPr>
-            <a:r>
-              <a:rPr sz="1600" b="1">
+              <a:rPr sz="1600" b="0">
                 <a:solidFill>
                   <a:srgbClr val="1E2329"/>
                 </a:solidFill>
@@ -7042,210 +7126,20 @@
                 <a:ea typeface="Pretendard"/>
                 <a:cs typeface="Pretendard"/>
               </a:rPr>
-              <a:t>ARR</a:t>
-            </a:r>
-          </a:p>
-        </p:txBody>
-      </p:sp>
-      <p:sp>
-        <p:nvSpPr>
-          <p:cNvPr id="17" name="TextBox 16"/>
-          <p:cNvSpPr txBox="1"/>
-          <p:nvPr/>
-        </p:nvSpPr>
-        <p:spPr>
-          <a:xfrm>
-            <a:off x="3665136" y="3782872"/>
-            <a:ext cx="2019230" cy="877824"/>
-          </a:xfrm>
-          <a:prstGeom prst="rect">
-            <a:avLst/>
-          </a:prstGeom>
-          <a:noFill/>
-        </p:spPr>
-        <p:txBody>
-          <a:bodyPr wrap="square" anchor="t" lIns="0" rIns="0" tIns="0" bIns="0">
-            <a:spAutoFit/>
-          </a:bodyPr>
-          <a:lstStyle/>
+              <a:t>•  단가 자동 산출</a:t>
+            </a:r>
+          </a:p>
           <a:p>
             <a:pPr algn="l">
               <a:lnSpc>
                 <a:spcPct val="115000"/>
               </a:lnSpc>
+              <a:spcAft>
+                <a:spcPts val="960"/>
+              </a:spcAft>
             </a:pPr>
             <a:r>
-              <a:rPr sz="1200" b="0">
-                <a:solidFill>
-                  <a:srgbClr val="6B7280"/>
-                </a:solidFill>
-                <a:latin typeface="Pretendard"/>
-                <a:ea typeface="Pretendard"/>
-                <a:cs typeface="Pretendard"/>
-              </a:rPr>
-              <a:t>2026.09 기준</a:t>
-            </a:r>
-          </a:p>
-        </p:txBody>
-      </p:sp>
-      <p:sp>
-        <p:nvSpPr>
-          <p:cNvPr id="18" name="Rectangle 17"/>
-          <p:cNvSpPr/>
-          <p:nvPr/>
-        </p:nvSpPr>
-        <p:spPr>
-          <a:xfrm>
-            <a:off x="6233006" y="1851660"/>
-            <a:ext cx="2567870" cy="2926080"/>
-          </a:xfrm>
-          <a:prstGeom prst="rect">
-            <a:avLst/>
-          </a:prstGeom>
-          <a:solidFill>
-            <a:srgbClr val="F3F5F8"/>
-          </a:solidFill>
-          <a:ln>
-            <a:noFill/>
-          </a:ln>
-          <a:effectLst/>
-        </p:spPr>
-        <p:style>
-          <a:lnRef idx="1">
-            <a:schemeClr val="accent1"/>
-          </a:lnRef>
-          <a:fillRef idx="3">
-            <a:schemeClr val="accent1"/>
-          </a:fillRef>
-          <a:effectRef idx="2">
-            <a:schemeClr val="accent1"/>
-          </a:effectRef>
-          <a:fontRef idx="minor">
-            <a:schemeClr val="lt1"/>
-          </a:fontRef>
-        </p:style>
-        <p:txBody>
-          <a:bodyPr rtlCol="0" anchor="ctr"/>
-          <a:lstStyle/>
-          <a:p>
-            <a:pPr algn="ctr"/>
-          </a:p>
-        </p:txBody>
-      </p:sp>
-      <p:sp>
-        <p:nvSpPr>
-          <p:cNvPr id="19" name="Rectangle 18"/>
-          <p:cNvSpPr/>
-          <p:nvPr/>
-        </p:nvSpPr>
-        <p:spPr>
-          <a:xfrm>
-            <a:off x="6233006" y="1851660"/>
-            <a:ext cx="2567870" cy="57150"/>
-          </a:xfrm>
-          <a:prstGeom prst="rect">
-            <a:avLst/>
-          </a:prstGeom>
-          <a:solidFill>
-            <a:srgbClr val="E8833A"/>
-          </a:solidFill>
-          <a:ln>
-            <a:noFill/>
-          </a:ln>
-          <a:effectLst/>
-        </p:spPr>
-        <p:style>
-          <a:lnRef idx="1">
-            <a:schemeClr val="accent1"/>
-          </a:lnRef>
-          <a:fillRef idx="3">
-            <a:schemeClr val="accent1"/>
-          </a:fillRef>
-          <a:effectRef idx="2">
-            <a:schemeClr val="accent1"/>
-          </a:effectRef>
-          <a:fontRef idx="minor">
-            <a:schemeClr val="lt1"/>
-          </a:fontRef>
-        </p:style>
-        <p:txBody>
-          <a:bodyPr rtlCol="0" anchor="ctr"/>
-          <a:lstStyle/>
-          <a:p>
-            <a:pPr algn="ctr"/>
-          </a:p>
-        </p:txBody>
-      </p:sp>
-      <p:sp>
-        <p:nvSpPr>
-          <p:cNvPr id="20" name="TextBox 19"/>
-          <p:cNvSpPr txBox="1"/>
-          <p:nvPr/>
-        </p:nvSpPr>
-        <p:spPr>
-          <a:xfrm>
-            <a:off x="6507326" y="2125980"/>
-            <a:ext cx="2019230" cy="1170432"/>
-          </a:xfrm>
-          <a:prstGeom prst="rect">
-            <a:avLst/>
-          </a:prstGeom>
-          <a:noFill/>
-        </p:spPr>
-        <p:txBody>
-          <a:bodyPr wrap="square" anchor="t" lIns="0" rIns="0" tIns="0" bIns="0">
-            <a:spAutoFit/>
-          </a:bodyPr>
-          <a:lstStyle/>
-          <a:p>
-            <a:pPr algn="l">
-              <a:lnSpc>
-                <a:spcPct val="115000"/>
-              </a:lnSpc>
-            </a:pPr>
-            <a:r>
-              <a:rPr sz="4000" b="1">
-                <a:solidFill>
-                  <a:srgbClr val="142A4D"/>
-                </a:solidFill>
-                <a:latin typeface="Pretendard"/>
-                <a:ea typeface="Pretendard"/>
-                <a:cs typeface="Pretendard"/>
-              </a:rPr>
-              <a:t>118%</a:t>
-            </a:r>
-          </a:p>
-        </p:txBody>
-      </p:sp>
-      <p:sp>
-        <p:nvSpPr>
-          <p:cNvPr id="21" name="TextBox 20"/>
-          <p:cNvSpPr txBox="1"/>
-          <p:nvPr/>
-        </p:nvSpPr>
-        <p:spPr>
-          <a:xfrm>
-            <a:off x="6507326" y="3314700"/>
-            <a:ext cx="2019230" cy="438912"/>
-          </a:xfrm>
-          <a:prstGeom prst="rect">
-            <a:avLst/>
-          </a:prstGeom>
-          <a:noFill/>
-        </p:spPr>
-        <p:txBody>
-          <a:bodyPr wrap="square" anchor="t" lIns="0" rIns="0" tIns="0" bIns="0">
-            <a:spAutoFit/>
-          </a:bodyPr>
-          <a:lstStyle/>
-          <a:p>
-            <a:pPr algn="l">
-              <a:lnSpc>
-                <a:spcPct val="115000"/>
-              </a:lnSpc>
-            </a:pPr>
-            <a:r>
-              <a:rPr sz="1600" b="1">
+              <a:rPr sz="1600" b="0">
                 <a:solidFill>
                   <a:srgbClr val="1E2329"/>
                 </a:solidFill>
@@ -7253,210 +7147,20 @@
                 <a:ea typeface="Pretendard"/>
                 <a:cs typeface="Pretendard"/>
               </a:rPr>
-              <a:t>NRR</a:t>
-            </a:r>
-          </a:p>
-        </p:txBody>
-      </p:sp>
-      <p:sp>
-        <p:nvSpPr>
-          <p:cNvPr id="22" name="TextBox 21"/>
-          <p:cNvSpPr txBox="1"/>
-          <p:nvPr/>
-        </p:nvSpPr>
-        <p:spPr>
-          <a:xfrm>
-            <a:off x="6507326" y="3782872"/>
-            <a:ext cx="2019230" cy="877824"/>
-          </a:xfrm>
-          <a:prstGeom prst="rect">
-            <a:avLst/>
-          </a:prstGeom>
-          <a:noFill/>
-        </p:spPr>
-        <p:txBody>
-          <a:bodyPr wrap="square" anchor="t" lIns="0" rIns="0" tIns="0" bIns="0">
-            <a:spAutoFit/>
-          </a:bodyPr>
-          <a:lstStyle/>
+              <a:t>•  규칙 기반 자동 승인</a:t>
+            </a:r>
+          </a:p>
           <a:p>
             <a:pPr algn="l">
               <a:lnSpc>
                 <a:spcPct val="115000"/>
               </a:lnSpc>
+              <a:spcAft>
+                <a:spcPts val="960"/>
+              </a:spcAft>
             </a:pPr>
             <a:r>
-              <a:rPr sz="1200" b="0">
-                <a:solidFill>
-                  <a:srgbClr val="D92D20"/>
-                </a:solidFill>
-                <a:latin typeface="Pretendard"/>
-                <a:ea typeface="Pretendard"/>
-                <a:cs typeface="Pretendard"/>
-              </a:rPr>
-              <a:t>[확인필요] 산식 재확인</a:t>
-            </a:r>
-          </a:p>
-        </p:txBody>
-      </p:sp>
-      <p:sp>
-        <p:nvSpPr>
-          <p:cNvPr id="23" name="Rectangle 22"/>
-          <p:cNvSpPr/>
-          <p:nvPr/>
-        </p:nvSpPr>
-        <p:spPr>
-          <a:xfrm>
-            <a:off x="9075196" y="1851660"/>
-            <a:ext cx="2567870" cy="2926080"/>
-          </a:xfrm>
-          <a:prstGeom prst="rect">
-            <a:avLst/>
-          </a:prstGeom>
-          <a:solidFill>
-            <a:srgbClr val="F3F5F8"/>
-          </a:solidFill>
-          <a:ln>
-            <a:noFill/>
-          </a:ln>
-          <a:effectLst/>
-        </p:spPr>
-        <p:style>
-          <a:lnRef idx="1">
-            <a:schemeClr val="accent1"/>
-          </a:lnRef>
-          <a:fillRef idx="3">
-            <a:schemeClr val="accent1"/>
-          </a:fillRef>
-          <a:effectRef idx="2">
-            <a:schemeClr val="accent1"/>
-          </a:effectRef>
-          <a:fontRef idx="minor">
-            <a:schemeClr val="lt1"/>
-          </a:fontRef>
-        </p:style>
-        <p:txBody>
-          <a:bodyPr rtlCol="0" anchor="ctr"/>
-          <a:lstStyle/>
-          <a:p>
-            <a:pPr algn="ctr"/>
-          </a:p>
-        </p:txBody>
-      </p:sp>
-      <p:sp>
-        <p:nvSpPr>
-          <p:cNvPr id="24" name="Rectangle 23"/>
-          <p:cNvSpPr/>
-          <p:nvPr/>
-        </p:nvSpPr>
-        <p:spPr>
-          <a:xfrm>
-            <a:off x="9075196" y="1851660"/>
-            <a:ext cx="2567870" cy="57150"/>
-          </a:xfrm>
-          <a:prstGeom prst="rect">
-            <a:avLst/>
-          </a:prstGeom>
-          <a:solidFill>
-            <a:srgbClr val="E8833A"/>
-          </a:solidFill>
-          <a:ln>
-            <a:noFill/>
-          </a:ln>
-          <a:effectLst/>
-        </p:spPr>
-        <p:style>
-          <a:lnRef idx="1">
-            <a:schemeClr val="accent1"/>
-          </a:lnRef>
-          <a:fillRef idx="3">
-            <a:schemeClr val="accent1"/>
-          </a:fillRef>
-          <a:effectRef idx="2">
-            <a:schemeClr val="accent1"/>
-          </a:effectRef>
-          <a:fontRef idx="minor">
-            <a:schemeClr val="lt1"/>
-          </a:fontRef>
-        </p:style>
-        <p:txBody>
-          <a:bodyPr rtlCol="0" anchor="ctr"/>
-          <a:lstStyle/>
-          <a:p>
-            <a:pPr algn="ctr"/>
-          </a:p>
-        </p:txBody>
-      </p:sp>
-      <p:sp>
-        <p:nvSpPr>
-          <p:cNvPr id="25" name="TextBox 24"/>
-          <p:cNvSpPr txBox="1"/>
-          <p:nvPr/>
-        </p:nvSpPr>
-        <p:spPr>
-          <a:xfrm>
-            <a:off x="9349516" y="2125980"/>
-            <a:ext cx="2019230" cy="1170432"/>
-          </a:xfrm>
-          <a:prstGeom prst="rect">
-            <a:avLst/>
-          </a:prstGeom>
-          <a:noFill/>
-        </p:spPr>
-        <p:txBody>
-          <a:bodyPr wrap="square" anchor="t" lIns="0" rIns="0" tIns="0" bIns="0">
-            <a:spAutoFit/>
-          </a:bodyPr>
-          <a:lstStyle/>
-          <a:p>
-            <a:pPr algn="l">
-              <a:lnSpc>
-                <a:spcPct val="115000"/>
-              </a:lnSpc>
-            </a:pPr>
-            <a:r>
-              <a:rPr sz="4000" b="1">
-                <a:solidFill>
-                  <a:srgbClr val="142A4D"/>
-                </a:solidFill>
-                <a:latin typeface="Pretendard"/>
-                <a:ea typeface="Pretendard"/>
-                <a:cs typeface="Pretendard"/>
-              </a:rPr>
-              <a:t>2.1%</a:t>
-            </a:r>
-          </a:p>
-        </p:txBody>
-      </p:sp>
-      <p:sp>
-        <p:nvSpPr>
-          <p:cNvPr id="26" name="TextBox 25"/>
-          <p:cNvSpPr txBox="1"/>
-          <p:nvPr/>
-        </p:nvSpPr>
-        <p:spPr>
-          <a:xfrm>
-            <a:off x="9349516" y="3314700"/>
-            <a:ext cx="2019230" cy="438912"/>
-          </a:xfrm>
-          <a:prstGeom prst="rect">
-            <a:avLst/>
-          </a:prstGeom>
-          <a:noFill/>
-        </p:spPr>
-        <p:txBody>
-          <a:bodyPr wrap="square" anchor="t" lIns="0" rIns="0" tIns="0" bIns="0">
-            <a:spAutoFit/>
-          </a:bodyPr>
-          <a:lstStyle/>
-          <a:p>
-            <a:pPr algn="l">
-              <a:lnSpc>
-                <a:spcPct val="115000"/>
-              </a:lnSpc>
-            </a:pPr>
-            <a:r>
-              <a:rPr sz="1600" b="1">
+              <a:rPr sz="1600" b="0">
                 <a:solidFill>
                   <a:srgbClr val="1E2329"/>
                 </a:solidFill>
@@ -7464,48 +7168,7 @@
                 <a:ea typeface="Pretendard"/>
                 <a:cs typeface="Pretendard"/>
               </a:rPr>
-              <a:t>월 이탈률</a:t>
-            </a:r>
-          </a:p>
-        </p:txBody>
-      </p:sp>
-      <p:sp>
-        <p:nvSpPr>
-          <p:cNvPr id="27" name="TextBox 26"/>
-          <p:cNvSpPr txBox="1"/>
-          <p:nvPr/>
-        </p:nvSpPr>
-        <p:spPr>
-          <a:xfrm>
-            <a:off x="9349516" y="3782872"/>
-            <a:ext cx="2019230" cy="877824"/>
-          </a:xfrm>
-          <a:prstGeom prst="rect">
-            <a:avLst/>
-          </a:prstGeom>
-          <a:noFill/>
-        </p:spPr>
-        <p:txBody>
-          <a:bodyPr wrap="square" anchor="t" lIns="0" rIns="0" tIns="0" bIns="0">
-            <a:spAutoFit/>
-          </a:bodyPr>
-          <a:lstStyle/>
-          <a:p>
-            <a:pPr algn="l">
-              <a:lnSpc>
-                <a:spcPct val="115000"/>
-              </a:lnSpc>
-            </a:pPr>
-            <a:r>
-              <a:rPr sz="1200" b="0">
-                <a:solidFill>
-                  <a:srgbClr val="6B7280"/>
-                </a:solidFill>
-                <a:latin typeface="Pretendard"/>
-                <a:ea typeface="Pretendard"/>
-                <a:cs typeface="Pretendard"/>
-              </a:rPr>
-              <a:t>최근 6개월 평균</a:t>
+              <a:t>•  회신 평균 4시간</a:t>
             </a:r>
           </a:p>
         </p:txBody>
@@ -7608,7 +7271,7 @@
                 <a:ea typeface="Pretendard"/>
                 <a:cs typeface="Pretendard"/>
               </a:rPr>
-              <a:t>03 트랙션</a:t>
+              <a:t>02 솔루션</a:t>
             </a:r>
           </a:p>
         </p:txBody>
@@ -7649,7 +7312,7 @@
                 <a:ea typeface="Pretendard"/>
                 <a:cs typeface="Pretendard"/>
               </a:rPr>
-              <a:t>분기 매출은 4개 분기 연속 2배 가까이 성장</a:t>
+              <a:t>경쟁사 대비 도입 기간과 비용이 가장 낮다</a:t>
             </a:r>
           </a:p>
         </p:txBody>
@@ -7734,7 +7397,7 @@
                 <a:ea typeface="Pretendard"/>
                 <a:cs typeface="Pretendard"/>
               </a:rPr>
-              <a:t>출처: 가상 데이터</a:t>
+              <a:t>출처: 각사 홈페이지(가상)</a:t>
             </a:r>
           </a:p>
         </p:txBody>
@@ -7776,751 +7439,6 @@
                 <a:cs typeface="Pretendard"/>
               </a:rPr>
               <a:t>6</a:t>
-            </a:r>
-          </a:p>
-        </p:txBody>
-      </p:sp>
-      <p:graphicFrame>
-        <p:nvGraphicFramePr>
-          <p:cNvPr id="8" name="Chart 7"/>
-          <p:cNvGraphicFramePr>
-            <a:graphicFrameLocks noGrp="1"/>
-          </p:cNvGraphicFramePr>
-          <p:nvPr/>
-        </p:nvGraphicFramePr>
-        <p:xfrm>
-          <a:off x="548626" y="1851660"/>
-          <a:ext cx="7322332" cy="4320540"/>
-        </p:xfrm>
-        <a:graphic>
-          <a:graphicData uri="http://schemas.openxmlformats.org/drawingml/2006/chart">
-            <c:chart xmlns:c="http://schemas.openxmlformats.org/drawingml/2006/chart" r:id="rId2"/>
-          </a:graphicData>
-        </a:graphic>
-      </p:graphicFrame>
-      <p:sp>
-        <p:nvSpPr>
-          <p:cNvPr id="9" name="TextBox 8"/>
-          <p:cNvSpPr txBox="1"/>
-          <p:nvPr/>
-        </p:nvSpPr>
-        <p:spPr>
-          <a:xfrm>
-            <a:off x="548626" y="1531620"/>
-            <a:ext cx="7322332" cy="274320"/>
-          </a:xfrm>
-          <a:prstGeom prst="rect">
-            <a:avLst/>
-          </a:prstGeom>
-          <a:noFill/>
-        </p:spPr>
-        <p:txBody>
-          <a:bodyPr wrap="square" anchor="t" lIns="0" rIns="0" tIns="0" bIns="0">
-            <a:spAutoFit/>
-          </a:bodyPr>
-          <a:lstStyle/>
-          <a:p>
-            <a:pPr algn="l">
-              <a:lnSpc>
-                <a:spcPct val="115000"/>
-              </a:lnSpc>
-            </a:pPr>
-            <a:r>
-              <a:rPr sz="1000" b="0">
-                <a:solidFill>
-                  <a:srgbClr val="6B7280"/>
-                </a:solidFill>
-                <a:latin typeface="Pretendard"/>
-                <a:ea typeface="Pretendard"/>
-                <a:cs typeface="Pretendard"/>
-              </a:rPr>
-              <a:t>단위: 만원</a:t>
-            </a:r>
-          </a:p>
-        </p:txBody>
-      </p:sp>
-      <p:sp>
-        <p:nvSpPr>
-          <p:cNvPr id="10" name="Rectangle 9"/>
-          <p:cNvSpPr/>
-          <p:nvPr/>
-        </p:nvSpPr>
-        <p:spPr>
-          <a:xfrm>
-            <a:off x="8236718" y="2125980"/>
-            <a:ext cx="57150" cy="457200"/>
-          </a:xfrm>
-          <a:prstGeom prst="rect">
-            <a:avLst/>
-          </a:prstGeom>
-          <a:solidFill>
-            <a:srgbClr val="E8833A"/>
-          </a:solidFill>
-          <a:ln>
-            <a:noFill/>
-          </a:ln>
-          <a:effectLst/>
-        </p:spPr>
-        <p:style>
-          <a:lnRef idx="1">
-            <a:schemeClr val="accent1"/>
-          </a:lnRef>
-          <a:fillRef idx="3">
-            <a:schemeClr val="accent1"/>
-          </a:fillRef>
-          <a:effectRef idx="2">
-            <a:schemeClr val="accent1"/>
-          </a:effectRef>
-          <a:fontRef idx="minor">
-            <a:schemeClr val="lt1"/>
-          </a:fontRef>
-        </p:style>
-        <p:txBody>
-          <a:bodyPr rtlCol="0" anchor="ctr"/>
-          <a:lstStyle/>
-          <a:p>
-            <a:pPr algn="ctr"/>
-          </a:p>
-        </p:txBody>
-      </p:sp>
-      <p:sp>
-        <p:nvSpPr>
-          <p:cNvPr id="11" name="TextBox 10"/>
-          <p:cNvSpPr txBox="1"/>
-          <p:nvPr/>
-        </p:nvSpPr>
-        <p:spPr>
-          <a:xfrm>
-            <a:off x="8465318" y="2125980"/>
-            <a:ext cx="3177751" cy="4046220"/>
-          </a:xfrm>
-          <a:prstGeom prst="rect">
-            <a:avLst/>
-          </a:prstGeom>
-          <a:noFill/>
-        </p:spPr>
-        <p:txBody>
-          <a:bodyPr wrap="square" anchor="t" lIns="0" rIns="0" tIns="0" bIns="0">
-            <a:spAutoFit/>
-          </a:bodyPr>
-          <a:lstStyle/>
-          <a:p>
-            <a:pPr algn="l">
-              <a:lnSpc>
-                <a:spcPct val="130000"/>
-              </a:lnSpc>
-            </a:pPr>
-            <a:r>
-              <a:rPr sz="1600" b="0">
-                <a:solidFill>
-                  <a:srgbClr val="1E2329"/>
-                </a:solidFill>
-                <a:latin typeface="Pretendard"/>
-                <a:ea typeface="Pretendard"/>
-                <a:cs typeface="Pretendard"/>
-              </a:rPr>
-              <a:t>3Q 매출 7,800만원
-전 분기 대비 +90%
-성장 동력: 기존 고객 업셀(좌석 추가)</a:t>
-            </a:r>
-          </a:p>
-        </p:txBody>
-      </p:sp>
-    </p:spTree>
-  </p:cSld>
-  <p:clrMapOvr>
-    <a:masterClrMapping/>
-  </p:clrMapOvr>
-</p:sld>
-</file>
-
-<file path=ppt/slides/slide7.xml><?xml version="1.0" encoding="utf-8"?>
-<p:sld xmlns:a="http://schemas.openxmlformats.org/drawingml/2006/main" xmlns:p="http://schemas.openxmlformats.org/presentationml/2006/main" xmlns:r="http://schemas.openxmlformats.org/officeDocument/2006/relationships">
-  <p:cSld>
-    <p:spTree>
-      <p:nvGrpSpPr>
-        <p:cNvPr id="1" name=""/>
-        <p:cNvGrpSpPr/>
-        <p:nvPr/>
-      </p:nvGrpSpPr>
-      <p:grpSpPr/>
-      <p:sp>
-        <p:nvSpPr>
-          <p:cNvPr id="2" name="Rectangle 1"/>
-          <p:cNvSpPr/>
-          <p:nvPr/>
-        </p:nvSpPr>
-        <p:spPr>
-          <a:xfrm>
-            <a:off x="0" y="0"/>
-            <a:ext cx="12191695" cy="6858000"/>
-          </a:xfrm>
-          <a:prstGeom prst="rect">
-            <a:avLst/>
-          </a:prstGeom>
-          <a:solidFill>
-            <a:srgbClr val="FFFFFF"/>
-          </a:solidFill>
-          <a:ln>
-            <a:noFill/>
-          </a:ln>
-          <a:effectLst/>
-        </p:spPr>
-        <p:style>
-          <a:lnRef idx="1">
-            <a:schemeClr val="accent1"/>
-          </a:lnRef>
-          <a:fillRef idx="3">
-            <a:schemeClr val="accent1"/>
-          </a:fillRef>
-          <a:effectRef idx="2">
-            <a:schemeClr val="accent1"/>
-          </a:effectRef>
-          <a:fontRef idx="minor">
-            <a:schemeClr val="lt1"/>
-          </a:fontRef>
-        </p:style>
-        <p:txBody>
-          <a:bodyPr rtlCol="0" anchor="ctr"/>
-          <a:lstStyle/>
-          <a:p>
-            <a:pPr algn="ctr"/>
-          </a:p>
-        </p:txBody>
-      </p:sp>
-      <p:sp>
-        <p:nvSpPr>
-          <p:cNvPr id="3" name="TextBox 2"/>
-          <p:cNvSpPr txBox="1"/>
-          <p:nvPr/>
-        </p:nvSpPr>
-        <p:spPr>
-          <a:xfrm>
-            <a:off x="548626" y="377190"/>
-            <a:ext cx="11094443" cy="274320"/>
-          </a:xfrm>
-          <a:prstGeom prst="rect">
-            <a:avLst/>
-          </a:prstGeom>
-          <a:noFill/>
-        </p:spPr>
-        <p:txBody>
-          <a:bodyPr wrap="square" anchor="t" lIns="0" rIns="0" tIns="0" bIns="0">
-            <a:spAutoFit/>
-          </a:bodyPr>
-          <a:lstStyle/>
-          <a:p>
-            <a:pPr algn="l">
-              <a:lnSpc>
-                <a:spcPct val="115000"/>
-              </a:lnSpc>
-            </a:pPr>
-            <a:r>
-              <a:rPr sz="1100" b="1">
-                <a:solidFill>
-                  <a:srgbClr val="E8833A"/>
-                </a:solidFill>
-                <a:latin typeface="Pretendard"/>
-                <a:ea typeface="Pretendard"/>
-                <a:cs typeface="Pretendard"/>
-              </a:rPr>
-              <a:t>04 재무 계획</a:t>
-            </a:r>
-          </a:p>
-        </p:txBody>
-      </p:sp>
-      <p:sp>
-        <p:nvSpPr>
-          <p:cNvPr id="4" name="TextBox 3"/>
-          <p:cNvSpPr txBox="1"/>
-          <p:nvPr/>
-        </p:nvSpPr>
-        <p:spPr>
-          <a:xfrm>
-            <a:off x="548626" y="651510"/>
-            <a:ext cx="11094443" cy="754380"/>
-          </a:xfrm>
-          <a:prstGeom prst="rect">
-            <a:avLst/>
-          </a:prstGeom>
-          <a:noFill/>
-        </p:spPr>
-        <p:txBody>
-          <a:bodyPr wrap="square" anchor="t" lIns="0" rIns="0" tIns="0" bIns="0">
-            <a:spAutoFit/>
-          </a:bodyPr>
-          <a:lstStyle/>
-          <a:p>
-            <a:pPr algn="l">
-              <a:lnSpc>
-                <a:spcPct val="110000"/>
-              </a:lnSpc>
-            </a:pPr>
-            <a:r>
-              <a:rPr sz="2600" b="1">
-                <a:solidFill>
-                  <a:srgbClr val="142A4D"/>
-                </a:solidFill>
-                <a:latin typeface="Pretendard"/>
-                <a:ea typeface="Pretendard"/>
-                <a:cs typeface="Pretendard"/>
-              </a:rPr>
-              <a:t>2028년 손익분기 도달 계획</a:t>
-            </a:r>
-          </a:p>
-        </p:txBody>
-      </p:sp>
-      <p:sp>
-        <p:nvSpPr>
-          <p:cNvPr id="5" name="Rectangle 4"/>
-          <p:cNvSpPr/>
-          <p:nvPr/>
-        </p:nvSpPr>
-        <p:spPr>
-          <a:xfrm>
-            <a:off x="548626" y="6386520"/>
-            <a:ext cx="11094443" cy="9525"/>
-          </a:xfrm>
-          <a:prstGeom prst="rect">
-            <a:avLst/>
-          </a:prstGeom>
-          <a:solidFill>
-            <a:srgbClr val="D9DEE5"/>
-          </a:solidFill>
-          <a:ln>
-            <a:noFill/>
-          </a:ln>
-          <a:effectLst/>
-        </p:spPr>
-        <p:style>
-          <a:lnRef idx="1">
-            <a:schemeClr val="accent1"/>
-          </a:lnRef>
-          <a:fillRef idx="3">
-            <a:schemeClr val="accent1"/>
-          </a:fillRef>
-          <a:effectRef idx="2">
-            <a:schemeClr val="accent1"/>
-          </a:effectRef>
-          <a:fontRef idx="minor">
-            <a:schemeClr val="lt1"/>
-          </a:fontRef>
-        </p:style>
-        <p:txBody>
-          <a:bodyPr rtlCol="0" anchor="ctr"/>
-          <a:lstStyle/>
-          <a:p>
-            <a:pPr algn="ctr"/>
-          </a:p>
-        </p:txBody>
-      </p:sp>
-      <p:sp>
-        <p:nvSpPr>
-          <p:cNvPr id="6" name="TextBox 5"/>
-          <p:cNvSpPr txBox="1"/>
-          <p:nvPr/>
-        </p:nvSpPr>
-        <p:spPr>
-          <a:xfrm>
-            <a:off x="548626" y="6446520"/>
-            <a:ext cx="10180043" cy="240030"/>
-          </a:xfrm>
-          <a:prstGeom prst="rect">
-            <a:avLst/>
-          </a:prstGeom>
-          <a:noFill/>
-        </p:spPr>
-        <p:txBody>
-          <a:bodyPr wrap="square" anchor="t" lIns="0" rIns="0" tIns="0" bIns="0">
-            <a:spAutoFit/>
-          </a:bodyPr>
-          <a:lstStyle/>
-          <a:p>
-            <a:pPr algn="l">
-              <a:lnSpc>
-                <a:spcPct val="115000"/>
-              </a:lnSpc>
-            </a:pPr>
-            <a:r>
-              <a:rPr sz="900" b="0">
-                <a:solidFill>
-                  <a:srgbClr val="6B7280"/>
-                </a:solidFill>
-                <a:latin typeface="Pretendard"/>
-                <a:ea typeface="Pretendard"/>
-                <a:cs typeface="Pretendard"/>
-              </a:rPr>
-              <a:t>출처: 가상 데이터 · 추정</a:t>
-            </a:r>
-          </a:p>
-        </p:txBody>
-      </p:sp>
-      <p:sp>
-        <p:nvSpPr>
-          <p:cNvPr id="7" name="TextBox 6"/>
-          <p:cNvSpPr txBox="1"/>
-          <p:nvPr/>
-        </p:nvSpPr>
-        <p:spPr>
-          <a:xfrm>
-            <a:off x="10728669" y="6446520"/>
-            <a:ext cx="914400" cy="240030"/>
-          </a:xfrm>
-          <a:prstGeom prst="rect">
-            <a:avLst/>
-          </a:prstGeom>
-          <a:noFill/>
-        </p:spPr>
-        <p:txBody>
-          <a:bodyPr wrap="square" anchor="t" lIns="0" rIns="0" tIns="0" bIns="0">
-            <a:spAutoFit/>
-          </a:bodyPr>
-          <a:lstStyle/>
-          <a:p>
-            <a:pPr algn="r">
-              <a:lnSpc>
-                <a:spcPct val="115000"/>
-              </a:lnSpc>
-            </a:pPr>
-            <a:r>
-              <a:rPr sz="900" b="0">
-                <a:solidFill>
-                  <a:srgbClr val="6B7280"/>
-                </a:solidFill>
-                <a:latin typeface="Pretendard"/>
-                <a:ea typeface="Pretendard"/>
-                <a:cs typeface="Pretendard"/>
-              </a:rPr>
-              <a:t>7</a:t>
-            </a:r>
-          </a:p>
-        </p:txBody>
-      </p:sp>
-      <p:graphicFrame>
-        <p:nvGraphicFramePr>
-          <p:cNvPr id="8" name="Chart 7"/>
-          <p:cNvGraphicFramePr>
-            <a:graphicFrameLocks noGrp="1"/>
-          </p:cNvGraphicFramePr>
-          <p:nvPr/>
-        </p:nvGraphicFramePr>
-        <p:xfrm>
-          <a:off x="548626" y="1851660"/>
-          <a:ext cx="11094443" cy="4320540"/>
-        </p:xfrm>
-        <a:graphic>
-          <a:graphicData uri="http://schemas.openxmlformats.org/drawingml/2006/chart">
-            <c:chart xmlns:c="http://schemas.openxmlformats.org/drawingml/2006/chart" r:id="rId2"/>
-          </a:graphicData>
-        </a:graphic>
-      </p:graphicFrame>
-      <p:sp>
-        <p:nvSpPr>
-          <p:cNvPr id="9" name="TextBox 8"/>
-          <p:cNvSpPr txBox="1"/>
-          <p:nvPr/>
-        </p:nvSpPr>
-        <p:spPr>
-          <a:xfrm>
-            <a:off x="548626" y="1531620"/>
-            <a:ext cx="11094443" cy="274320"/>
-          </a:xfrm>
-          <a:prstGeom prst="rect">
-            <a:avLst/>
-          </a:prstGeom>
-          <a:noFill/>
-        </p:spPr>
-        <p:txBody>
-          <a:bodyPr wrap="square" anchor="t" lIns="0" rIns="0" tIns="0" bIns="0">
-            <a:spAutoFit/>
-          </a:bodyPr>
-          <a:lstStyle/>
-          <a:p>
-            <a:pPr algn="l">
-              <a:lnSpc>
-                <a:spcPct val="115000"/>
-              </a:lnSpc>
-            </a:pPr>
-            <a:r>
-              <a:rPr sz="1000" b="0">
-                <a:solidFill>
-                  <a:srgbClr val="6B7280"/>
-                </a:solidFill>
-                <a:latin typeface="Pretendard"/>
-                <a:ea typeface="Pretendard"/>
-                <a:cs typeface="Pretendard"/>
-              </a:rPr>
-              <a:t>단위: 억원</a:t>
-            </a:r>
-          </a:p>
-        </p:txBody>
-      </p:sp>
-    </p:spTree>
-  </p:cSld>
-  <p:clrMapOvr>
-    <a:masterClrMapping/>
-  </p:clrMapOvr>
-</p:sld>
-</file>
-
-<file path=ppt/slides/slide8.xml><?xml version="1.0" encoding="utf-8"?>
-<p:sld xmlns:a="http://schemas.openxmlformats.org/drawingml/2006/main" xmlns:p="http://schemas.openxmlformats.org/presentationml/2006/main" xmlns:r="http://schemas.openxmlformats.org/officeDocument/2006/relationships">
-  <p:cSld>
-    <p:spTree>
-      <p:nvGrpSpPr>
-        <p:cNvPr id="1" name=""/>
-        <p:cNvGrpSpPr/>
-        <p:nvPr/>
-      </p:nvGrpSpPr>
-      <p:grpSpPr/>
-      <p:sp>
-        <p:nvSpPr>
-          <p:cNvPr id="2" name="Rectangle 1"/>
-          <p:cNvSpPr/>
-          <p:nvPr/>
-        </p:nvSpPr>
-        <p:spPr>
-          <a:xfrm>
-            <a:off x="0" y="0"/>
-            <a:ext cx="12191695" cy="6858000"/>
-          </a:xfrm>
-          <a:prstGeom prst="rect">
-            <a:avLst/>
-          </a:prstGeom>
-          <a:solidFill>
-            <a:srgbClr val="FFFFFF"/>
-          </a:solidFill>
-          <a:ln>
-            <a:noFill/>
-          </a:ln>
-          <a:effectLst/>
-        </p:spPr>
-        <p:style>
-          <a:lnRef idx="1">
-            <a:schemeClr val="accent1"/>
-          </a:lnRef>
-          <a:fillRef idx="3">
-            <a:schemeClr val="accent1"/>
-          </a:fillRef>
-          <a:effectRef idx="2">
-            <a:schemeClr val="accent1"/>
-          </a:effectRef>
-          <a:fontRef idx="minor">
-            <a:schemeClr val="lt1"/>
-          </a:fontRef>
-        </p:style>
-        <p:txBody>
-          <a:bodyPr rtlCol="0" anchor="ctr"/>
-          <a:lstStyle/>
-          <a:p>
-            <a:pPr algn="ctr"/>
-          </a:p>
-        </p:txBody>
-      </p:sp>
-      <p:sp>
-        <p:nvSpPr>
-          <p:cNvPr id="3" name="TextBox 2"/>
-          <p:cNvSpPr txBox="1"/>
-          <p:nvPr/>
-        </p:nvSpPr>
-        <p:spPr>
-          <a:xfrm>
-            <a:off x="548626" y="377190"/>
-            <a:ext cx="11094443" cy="274320"/>
-          </a:xfrm>
-          <a:prstGeom prst="rect">
-            <a:avLst/>
-          </a:prstGeom>
-          <a:noFill/>
-        </p:spPr>
-        <p:txBody>
-          <a:bodyPr wrap="square" anchor="t" lIns="0" rIns="0" tIns="0" bIns="0">
-            <a:spAutoFit/>
-          </a:bodyPr>
-          <a:lstStyle/>
-          <a:p>
-            <a:pPr algn="l">
-              <a:lnSpc>
-                <a:spcPct val="115000"/>
-              </a:lnSpc>
-            </a:pPr>
-            <a:r>
-              <a:rPr sz="1100" b="1">
-                <a:solidFill>
-                  <a:srgbClr val="E8833A"/>
-                </a:solidFill>
-                <a:latin typeface="Pretendard"/>
-                <a:ea typeface="Pretendard"/>
-                <a:cs typeface="Pretendard"/>
-              </a:rPr>
-              <a:t>02 솔루션</a:t>
-            </a:r>
-          </a:p>
-        </p:txBody>
-      </p:sp>
-      <p:sp>
-        <p:nvSpPr>
-          <p:cNvPr id="4" name="TextBox 3"/>
-          <p:cNvSpPr txBox="1"/>
-          <p:nvPr/>
-        </p:nvSpPr>
-        <p:spPr>
-          <a:xfrm>
-            <a:off x="548626" y="651510"/>
-            <a:ext cx="11094443" cy="754380"/>
-          </a:xfrm>
-          <a:prstGeom prst="rect">
-            <a:avLst/>
-          </a:prstGeom>
-          <a:noFill/>
-        </p:spPr>
-        <p:txBody>
-          <a:bodyPr wrap="square" anchor="t" lIns="0" rIns="0" tIns="0" bIns="0">
-            <a:spAutoFit/>
-          </a:bodyPr>
-          <a:lstStyle/>
-          <a:p>
-            <a:pPr algn="l">
-              <a:lnSpc>
-                <a:spcPct val="110000"/>
-              </a:lnSpc>
-            </a:pPr>
-            <a:r>
-              <a:rPr sz="2600" b="1">
-                <a:solidFill>
-                  <a:srgbClr val="142A4D"/>
-                </a:solidFill>
-                <a:latin typeface="Pretendard"/>
-                <a:ea typeface="Pretendard"/>
-                <a:cs typeface="Pretendard"/>
-              </a:rPr>
-              <a:t>경쟁사 대비 도입 기간과 비용이 가장 낮다</a:t>
-            </a:r>
-          </a:p>
-        </p:txBody>
-      </p:sp>
-      <p:sp>
-        <p:nvSpPr>
-          <p:cNvPr id="5" name="Rectangle 4"/>
-          <p:cNvSpPr/>
-          <p:nvPr/>
-        </p:nvSpPr>
-        <p:spPr>
-          <a:xfrm>
-            <a:off x="548626" y="6386520"/>
-            <a:ext cx="11094443" cy="9525"/>
-          </a:xfrm>
-          <a:prstGeom prst="rect">
-            <a:avLst/>
-          </a:prstGeom>
-          <a:solidFill>
-            <a:srgbClr val="D9DEE5"/>
-          </a:solidFill>
-          <a:ln>
-            <a:noFill/>
-          </a:ln>
-          <a:effectLst/>
-        </p:spPr>
-        <p:style>
-          <a:lnRef idx="1">
-            <a:schemeClr val="accent1"/>
-          </a:lnRef>
-          <a:fillRef idx="3">
-            <a:schemeClr val="accent1"/>
-          </a:fillRef>
-          <a:effectRef idx="2">
-            <a:schemeClr val="accent1"/>
-          </a:effectRef>
-          <a:fontRef idx="minor">
-            <a:schemeClr val="lt1"/>
-          </a:fontRef>
-        </p:style>
-        <p:txBody>
-          <a:bodyPr rtlCol="0" anchor="ctr"/>
-          <a:lstStyle/>
-          <a:p>
-            <a:pPr algn="ctr"/>
-          </a:p>
-        </p:txBody>
-      </p:sp>
-      <p:sp>
-        <p:nvSpPr>
-          <p:cNvPr id="6" name="TextBox 5"/>
-          <p:cNvSpPr txBox="1"/>
-          <p:nvPr/>
-        </p:nvSpPr>
-        <p:spPr>
-          <a:xfrm>
-            <a:off x="548626" y="6446520"/>
-            <a:ext cx="10180043" cy="240030"/>
-          </a:xfrm>
-          <a:prstGeom prst="rect">
-            <a:avLst/>
-          </a:prstGeom>
-          <a:noFill/>
-        </p:spPr>
-        <p:txBody>
-          <a:bodyPr wrap="square" anchor="t" lIns="0" rIns="0" tIns="0" bIns="0">
-            <a:spAutoFit/>
-          </a:bodyPr>
-          <a:lstStyle/>
-          <a:p>
-            <a:pPr algn="l">
-              <a:lnSpc>
-                <a:spcPct val="115000"/>
-              </a:lnSpc>
-            </a:pPr>
-            <a:r>
-              <a:rPr sz="900" b="0">
-                <a:solidFill>
-                  <a:srgbClr val="6B7280"/>
-                </a:solidFill>
-                <a:latin typeface="Pretendard"/>
-                <a:ea typeface="Pretendard"/>
-                <a:cs typeface="Pretendard"/>
-              </a:rPr>
-              <a:t>출처: 각사 홈페이지(가상)</a:t>
-            </a:r>
-          </a:p>
-        </p:txBody>
-      </p:sp>
-      <p:sp>
-        <p:nvSpPr>
-          <p:cNvPr id="7" name="TextBox 6"/>
-          <p:cNvSpPr txBox="1"/>
-          <p:nvPr/>
-        </p:nvSpPr>
-        <p:spPr>
-          <a:xfrm>
-            <a:off x="10728669" y="6446520"/>
-            <a:ext cx="914400" cy="240030"/>
-          </a:xfrm>
-          <a:prstGeom prst="rect">
-            <a:avLst/>
-          </a:prstGeom>
-          <a:noFill/>
-        </p:spPr>
-        <p:txBody>
-          <a:bodyPr wrap="square" anchor="t" lIns="0" rIns="0" tIns="0" bIns="0">
-            <a:spAutoFit/>
-          </a:bodyPr>
-          <a:lstStyle/>
-          <a:p>
-            <a:pPr algn="r">
-              <a:lnSpc>
-                <a:spcPct val="115000"/>
-              </a:lnSpc>
-            </a:pPr>
-            <a:r>
-              <a:rPr sz="900" b="0">
-                <a:solidFill>
-                  <a:srgbClr val="6B7280"/>
-                </a:solidFill>
-                <a:latin typeface="Pretendard"/>
-                <a:ea typeface="Pretendard"/>
-                <a:cs typeface="Pretendard"/>
-              </a:rPr>
-              <a:t>8</a:t>
             </a:r>
           </a:p>
         </p:txBody>
@@ -9071,6 +7989,1536 @@
 </p:sld>
 </file>
 
+<file path=ppt/slides/slide7.xml><?xml version="1.0" encoding="utf-8"?>
+<p:sld xmlns:a="http://schemas.openxmlformats.org/drawingml/2006/main" xmlns:p="http://schemas.openxmlformats.org/presentationml/2006/main" xmlns:r="http://schemas.openxmlformats.org/officeDocument/2006/relationships">
+  <p:cSld>
+    <p:spTree>
+      <p:nvGrpSpPr>
+        <p:cNvPr id="1" name=""/>
+        <p:cNvGrpSpPr/>
+        <p:nvPr/>
+      </p:nvGrpSpPr>
+      <p:grpSpPr/>
+      <p:sp>
+        <p:nvSpPr>
+          <p:cNvPr id="2" name="Rectangle 1"/>
+          <p:cNvSpPr/>
+          <p:nvPr/>
+        </p:nvSpPr>
+        <p:spPr>
+          <a:xfrm>
+            <a:off x="0" y="0"/>
+            <a:ext cx="12191695" cy="6858000"/>
+          </a:xfrm>
+          <a:prstGeom prst="rect">
+            <a:avLst/>
+          </a:prstGeom>
+          <a:solidFill>
+            <a:srgbClr val="FFFFFF"/>
+          </a:solidFill>
+          <a:ln>
+            <a:noFill/>
+          </a:ln>
+          <a:effectLst/>
+        </p:spPr>
+        <p:style>
+          <a:lnRef idx="1">
+            <a:schemeClr val="accent1"/>
+          </a:lnRef>
+          <a:fillRef idx="3">
+            <a:schemeClr val="accent1"/>
+          </a:fillRef>
+          <a:effectRef idx="2">
+            <a:schemeClr val="accent1"/>
+          </a:effectRef>
+          <a:fontRef idx="minor">
+            <a:schemeClr val="lt1"/>
+          </a:fontRef>
+        </p:style>
+        <p:txBody>
+          <a:bodyPr rtlCol="0" anchor="ctr"/>
+          <a:lstStyle/>
+          <a:p>
+            <a:pPr algn="ctr"/>
+          </a:p>
+        </p:txBody>
+      </p:sp>
+      <p:sp>
+        <p:nvSpPr>
+          <p:cNvPr id="3" name="TextBox 2"/>
+          <p:cNvSpPr txBox="1"/>
+          <p:nvPr/>
+        </p:nvSpPr>
+        <p:spPr>
+          <a:xfrm>
+            <a:off x="548626" y="377190"/>
+            <a:ext cx="11094443" cy="274320"/>
+          </a:xfrm>
+          <a:prstGeom prst="rect">
+            <a:avLst/>
+          </a:prstGeom>
+          <a:noFill/>
+        </p:spPr>
+        <p:txBody>
+          <a:bodyPr wrap="square" anchor="t" lIns="0" rIns="0" tIns="0" bIns="0">
+            <a:spAutoFit/>
+          </a:bodyPr>
+          <a:lstStyle/>
+          <a:p>
+            <a:pPr algn="l">
+              <a:lnSpc>
+                <a:spcPct val="115000"/>
+              </a:lnSpc>
+            </a:pPr>
+            <a:r>
+              <a:rPr sz="1100" b="1">
+                <a:solidFill>
+                  <a:srgbClr val="E8833A"/>
+                </a:solidFill>
+                <a:latin typeface="Pretendard"/>
+                <a:ea typeface="Pretendard"/>
+                <a:cs typeface="Pretendard"/>
+              </a:rPr>
+              <a:t>03 트랙션</a:t>
+            </a:r>
+          </a:p>
+        </p:txBody>
+      </p:sp>
+      <p:sp>
+        <p:nvSpPr>
+          <p:cNvPr id="4" name="TextBox 3"/>
+          <p:cNvSpPr txBox="1"/>
+          <p:nvPr/>
+        </p:nvSpPr>
+        <p:spPr>
+          <a:xfrm>
+            <a:off x="548626" y="651510"/>
+            <a:ext cx="11094443" cy="754380"/>
+          </a:xfrm>
+          <a:prstGeom prst="rect">
+            <a:avLst/>
+          </a:prstGeom>
+          <a:noFill/>
+        </p:spPr>
+        <p:txBody>
+          <a:bodyPr wrap="square" anchor="t" lIns="0" rIns="0" tIns="0" bIns="0">
+            <a:spAutoFit/>
+          </a:bodyPr>
+          <a:lstStyle/>
+          <a:p>
+            <a:pPr algn="l">
+              <a:lnSpc>
+                <a:spcPct val="110000"/>
+              </a:lnSpc>
+            </a:pPr>
+            <a:r>
+              <a:rPr sz="2600" b="1">
+                <a:solidFill>
+                  <a:srgbClr val="142A4D"/>
+                </a:solidFill>
+                <a:latin typeface="Pretendard"/>
+                <a:ea typeface="Pretendard"/>
+                <a:cs typeface="Pretendard"/>
+              </a:rPr>
+              <a:t>분기 매출은 4개 분기 연속 2배 가까이 성장</a:t>
+            </a:r>
+          </a:p>
+        </p:txBody>
+      </p:sp>
+      <p:sp>
+        <p:nvSpPr>
+          <p:cNvPr id="5" name="Rectangle 4"/>
+          <p:cNvSpPr/>
+          <p:nvPr/>
+        </p:nvSpPr>
+        <p:spPr>
+          <a:xfrm>
+            <a:off x="548626" y="6386520"/>
+            <a:ext cx="11094443" cy="9525"/>
+          </a:xfrm>
+          <a:prstGeom prst="rect">
+            <a:avLst/>
+          </a:prstGeom>
+          <a:solidFill>
+            <a:srgbClr val="D9DEE5"/>
+          </a:solidFill>
+          <a:ln>
+            <a:noFill/>
+          </a:ln>
+          <a:effectLst/>
+        </p:spPr>
+        <p:style>
+          <a:lnRef idx="1">
+            <a:schemeClr val="accent1"/>
+          </a:lnRef>
+          <a:fillRef idx="3">
+            <a:schemeClr val="accent1"/>
+          </a:fillRef>
+          <a:effectRef idx="2">
+            <a:schemeClr val="accent1"/>
+          </a:effectRef>
+          <a:fontRef idx="minor">
+            <a:schemeClr val="lt1"/>
+          </a:fontRef>
+        </p:style>
+        <p:txBody>
+          <a:bodyPr rtlCol="0" anchor="ctr"/>
+          <a:lstStyle/>
+          <a:p>
+            <a:pPr algn="ctr"/>
+          </a:p>
+        </p:txBody>
+      </p:sp>
+      <p:sp>
+        <p:nvSpPr>
+          <p:cNvPr id="6" name="TextBox 5"/>
+          <p:cNvSpPr txBox="1"/>
+          <p:nvPr/>
+        </p:nvSpPr>
+        <p:spPr>
+          <a:xfrm>
+            <a:off x="548626" y="6446520"/>
+            <a:ext cx="10180043" cy="240030"/>
+          </a:xfrm>
+          <a:prstGeom prst="rect">
+            <a:avLst/>
+          </a:prstGeom>
+          <a:noFill/>
+        </p:spPr>
+        <p:txBody>
+          <a:bodyPr wrap="square" anchor="t" lIns="0" rIns="0" tIns="0" bIns="0">
+            <a:spAutoFit/>
+          </a:bodyPr>
+          <a:lstStyle/>
+          <a:p>
+            <a:pPr algn="l">
+              <a:lnSpc>
+                <a:spcPct val="115000"/>
+              </a:lnSpc>
+            </a:pPr>
+            <a:r>
+              <a:rPr sz="900" b="0">
+                <a:solidFill>
+                  <a:srgbClr val="6B7280"/>
+                </a:solidFill>
+                <a:latin typeface="Pretendard"/>
+                <a:ea typeface="Pretendard"/>
+                <a:cs typeface="Pretendard"/>
+              </a:rPr>
+              <a:t>출처: 가상 데이터</a:t>
+            </a:r>
+          </a:p>
+        </p:txBody>
+      </p:sp>
+      <p:sp>
+        <p:nvSpPr>
+          <p:cNvPr id="7" name="TextBox 6"/>
+          <p:cNvSpPr txBox="1"/>
+          <p:nvPr/>
+        </p:nvSpPr>
+        <p:spPr>
+          <a:xfrm>
+            <a:off x="10728669" y="6446520"/>
+            <a:ext cx="914400" cy="240030"/>
+          </a:xfrm>
+          <a:prstGeom prst="rect">
+            <a:avLst/>
+          </a:prstGeom>
+          <a:noFill/>
+        </p:spPr>
+        <p:txBody>
+          <a:bodyPr wrap="square" anchor="t" lIns="0" rIns="0" tIns="0" bIns="0">
+            <a:spAutoFit/>
+          </a:bodyPr>
+          <a:lstStyle/>
+          <a:p>
+            <a:pPr algn="r">
+              <a:lnSpc>
+                <a:spcPct val="115000"/>
+              </a:lnSpc>
+            </a:pPr>
+            <a:r>
+              <a:rPr sz="900" b="0">
+                <a:solidFill>
+                  <a:srgbClr val="6B7280"/>
+                </a:solidFill>
+                <a:latin typeface="Pretendard"/>
+                <a:ea typeface="Pretendard"/>
+                <a:cs typeface="Pretendard"/>
+              </a:rPr>
+              <a:t>7</a:t>
+            </a:r>
+          </a:p>
+        </p:txBody>
+      </p:sp>
+      <p:graphicFrame>
+        <p:nvGraphicFramePr>
+          <p:cNvPr id="8" name="Chart 7"/>
+          <p:cNvGraphicFramePr>
+            <a:graphicFrameLocks noGrp="1"/>
+          </p:cNvGraphicFramePr>
+          <p:nvPr/>
+        </p:nvGraphicFramePr>
+        <p:xfrm>
+          <a:off x="548626" y="1851660"/>
+          <a:ext cx="7322332" cy="4320540"/>
+        </p:xfrm>
+        <a:graphic>
+          <a:graphicData uri="http://schemas.openxmlformats.org/drawingml/2006/chart">
+            <c:chart xmlns:c="http://schemas.openxmlformats.org/drawingml/2006/chart" r:id="rId2"/>
+          </a:graphicData>
+        </a:graphic>
+      </p:graphicFrame>
+      <p:sp>
+        <p:nvSpPr>
+          <p:cNvPr id="9" name="TextBox 8"/>
+          <p:cNvSpPr txBox="1"/>
+          <p:nvPr/>
+        </p:nvSpPr>
+        <p:spPr>
+          <a:xfrm>
+            <a:off x="548626" y="1531620"/>
+            <a:ext cx="7322332" cy="274320"/>
+          </a:xfrm>
+          <a:prstGeom prst="rect">
+            <a:avLst/>
+          </a:prstGeom>
+          <a:noFill/>
+        </p:spPr>
+        <p:txBody>
+          <a:bodyPr wrap="square" anchor="t" lIns="0" rIns="0" tIns="0" bIns="0">
+            <a:spAutoFit/>
+          </a:bodyPr>
+          <a:lstStyle/>
+          <a:p>
+            <a:pPr algn="l">
+              <a:lnSpc>
+                <a:spcPct val="115000"/>
+              </a:lnSpc>
+            </a:pPr>
+            <a:r>
+              <a:rPr sz="1000" b="0">
+                <a:solidFill>
+                  <a:srgbClr val="6B7280"/>
+                </a:solidFill>
+                <a:latin typeface="Pretendard"/>
+                <a:ea typeface="Pretendard"/>
+                <a:cs typeface="Pretendard"/>
+              </a:rPr>
+              <a:t>단위: 만원</a:t>
+            </a:r>
+          </a:p>
+        </p:txBody>
+      </p:sp>
+      <p:sp>
+        <p:nvSpPr>
+          <p:cNvPr id="10" name="Rectangle 9"/>
+          <p:cNvSpPr/>
+          <p:nvPr/>
+        </p:nvSpPr>
+        <p:spPr>
+          <a:xfrm>
+            <a:off x="8236718" y="2125980"/>
+            <a:ext cx="57150" cy="457200"/>
+          </a:xfrm>
+          <a:prstGeom prst="rect">
+            <a:avLst/>
+          </a:prstGeom>
+          <a:solidFill>
+            <a:srgbClr val="E8833A"/>
+          </a:solidFill>
+          <a:ln>
+            <a:noFill/>
+          </a:ln>
+          <a:effectLst/>
+        </p:spPr>
+        <p:style>
+          <a:lnRef idx="1">
+            <a:schemeClr val="accent1"/>
+          </a:lnRef>
+          <a:fillRef idx="3">
+            <a:schemeClr val="accent1"/>
+          </a:fillRef>
+          <a:effectRef idx="2">
+            <a:schemeClr val="accent1"/>
+          </a:effectRef>
+          <a:fontRef idx="minor">
+            <a:schemeClr val="lt1"/>
+          </a:fontRef>
+        </p:style>
+        <p:txBody>
+          <a:bodyPr rtlCol="0" anchor="ctr"/>
+          <a:lstStyle/>
+          <a:p>
+            <a:pPr algn="ctr"/>
+          </a:p>
+        </p:txBody>
+      </p:sp>
+      <p:sp>
+        <p:nvSpPr>
+          <p:cNvPr id="11" name="TextBox 10"/>
+          <p:cNvSpPr txBox="1"/>
+          <p:nvPr/>
+        </p:nvSpPr>
+        <p:spPr>
+          <a:xfrm>
+            <a:off x="8465318" y="2125980"/>
+            <a:ext cx="3177751" cy="4046220"/>
+          </a:xfrm>
+          <a:prstGeom prst="rect">
+            <a:avLst/>
+          </a:prstGeom>
+          <a:noFill/>
+        </p:spPr>
+        <p:txBody>
+          <a:bodyPr wrap="square" anchor="t" lIns="0" rIns="0" tIns="0" bIns="0">
+            <a:spAutoFit/>
+          </a:bodyPr>
+          <a:lstStyle/>
+          <a:p>
+            <a:pPr algn="l">
+              <a:lnSpc>
+                <a:spcPct val="130000"/>
+              </a:lnSpc>
+            </a:pPr>
+            <a:r>
+              <a:rPr sz="1600" b="0">
+                <a:solidFill>
+                  <a:srgbClr val="1E2329"/>
+                </a:solidFill>
+                <a:latin typeface="Pretendard"/>
+                <a:ea typeface="Pretendard"/>
+                <a:cs typeface="Pretendard"/>
+              </a:rPr>
+              <a:t>3Q 매출 7,800만원
+전 분기 대비 +90%
+성장 동력: 기존 고객 업셀(좌석 추가)</a:t>
+            </a:r>
+          </a:p>
+        </p:txBody>
+      </p:sp>
+    </p:spTree>
+  </p:cSld>
+  <p:clrMapOvr>
+    <a:masterClrMapping/>
+  </p:clrMapOvr>
+</p:sld>
+</file>
+
+<file path=ppt/slides/slide8.xml><?xml version="1.0" encoding="utf-8"?>
+<p:sld xmlns:a="http://schemas.openxmlformats.org/drawingml/2006/main" xmlns:p="http://schemas.openxmlformats.org/presentationml/2006/main" xmlns:r="http://schemas.openxmlformats.org/officeDocument/2006/relationships">
+  <p:cSld>
+    <p:spTree>
+      <p:nvGrpSpPr>
+        <p:cNvPr id="1" name=""/>
+        <p:cNvGrpSpPr/>
+        <p:nvPr/>
+      </p:nvGrpSpPr>
+      <p:grpSpPr/>
+      <p:sp>
+        <p:nvSpPr>
+          <p:cNvPr id="2" name="Rectangle 1"/>
+          <p:cNvSpPr/>
+          <p:nvPr/>
+        </p:nvSpPr>
+        <p:spPr>
+          <a:xfrm>
+            <a:off x="0" y="0"/>
+            <a:ext cx="12191695" cy="6858000"/>
+          </a:xfrm>
+          <a:prstGeom prst="rect">
+            <a:avLst/>
+          </a:prstGeom>
+          <a:solidFill>
+            <a:srgbClr val="FFFFFF"/>
+          </a:solidFill>
+          <a:ln>
+            <a:noFill/>
+          </a:ln>
+          <a:effectLst/>
+        </p:spPr>
+        <p:style>
+          <a:lnRef idx="1">
+            <a:schemeClr val="accent1"/>
+          </a:lnRef>
+          <a:fillRef idx="3">
+            <a:schemeClr val="accent1"/>
+          </a:fillRef>
+          <a:effectRef idx="2">
+            <a:schemeClr val="accent1"/>
+          </a:effectRef>
+          <a:fontRef idx="minor">
+            <a:schemeClr val="lt1"/>
+          </a:fontRef>
+        </p:style>
+        <p:txBody>
+          <a:bodyPr rtlCol="0" anchor="ctr"/>
+          <a:lstStyle/>
+          <a:p>
+            <a:pPr algn="ctr"/>
+          </a:p>
+        </p:txBody>
+      </p:sp>
+      <p:sp>
+        <p:nvSpPr>
+          <p:cNvPr id="3" name="TextBox 2"/>
+          <p:cNvSpPr txBox="1"/>
+          <p:nvPr/>
+        </p:nvSpPr>
+        <p:spPr>
+          <a:xfrm>
+            <a:off x="548626" y="377190"/>
+            <a:ext cx="11094443" cy="274320"/>
+          </a:xfrm>
+          <a:prstGeom prst="rect">
+            <a:avLst/>
+          </a:prstGeom>
+          <a:noFill/>
+        </p:spPr>
+        <p:txBody>
+          <a:bodyPr wrap="square" anchor="t" lIns="0" rIns="0" tIns="0" bIns="0">
+            <a:spAutoFit/>
+          </a:bodyPr>
+          <a:lstStyle/>
+          <a:p>
+            <a:pPr algn="l">
+              <a:lnSpc>
+                <a:spcPct val="115000"/>
+              </a:lnSpc>
+            </a:pPr>
+            <a:r>
+              <a:rPr sz="1100" b="1">
+                <a:solidFill>
+                  <a:srgbClr val="E8833A"/>
+                </a:solidFill>
+                <a:latin typeface="Pretendard"/>
+                <a:ea typeface="Pretendard"/>
+                <a:cs typeface="Pretendard"/>
+              </a:rPr>
+              <a:t>03 트랙션</a:t>
+            </a:r>
+          </a:p>
+        </p:txBody>
+      </p:sp>
+      <p:sp>
+        <p:nvSpPr>
+          <p:cNvPr id="4" name="TextBox 3"/>
+          <p:cNvSpPr txBox="1"/>
+          <p:nvPr/>
+        </p:nvSpPr>
+        <p:spPr>
+          <a:xfrm>
+            <a:off x="548626" y="651510"/>
+            <a:ext cx="11094443" cy="754380"/>
+          </a:xfrm>
+          <a:prstGeom prst="rect">
+            <a:avLst/>
+          </a:prstGeom>
+          <a:noFill/>
+        </p:spPr>
+        <p:txBody>
+          <a:bodyPr wrap="square" anchor="t" lIns="0" rIns="0" tIns="0" bIns="0">
+            <a:spAutoFit/>
+          </a:bodyPr>
+          <a:lstStyle/>
+          <a:p>
+            <a:pPr algn="l">
+              <a:lnSpc>
+                <a:spcPct val="110000"/>
+              </a:lnSpc>
+            </a:pPr>
+            <a:r>
+              <a:rPr sz="2600" b="1">
+                <a:solidFill>
+                  <a:srgbClr val="142A4D"/>
+                </a:solidFill>
+                <a:latin typeface="Pretendard"/>
+                <a:ea typeface="Pretendard"/>
+                <a:cs typeface="Pretendard"/>
+              </a:rPr>
+              <a:t>출시 9개월 만에 유료 고객 42곳 확보</a:t>
+            </a:r>
+          </a:p>
+        </p:txBody>
+      </p:sp>
+      <p:sp>
+        <p:nvSpPr>
+          <p:cNvPr id="5" name="Rectangle 4"/>
+          <p:cNvSpPr/>
+          <p:nvPr/>
+        </p:nvSpPr>
+        <p:spPr>
+          <a:xfrm>
+            <a:off x="548626" y="6386520"/>
+            <a:ext cx="11094443" cy="9525"/>
+          </a:xfrm>
+          <a:prstGeom prst="rect">
+            <a:avLst/>
+          </a:prstGeom>
+          <a:solidFill>
+            <a:srgbClr val="D9DEE5"/>
+          </a:solidFill>
+          <a:ln>
+            <a:noFill/>
+          </a:ln>
+          <a:effectLst/>
+        </p:spPr>
+        <p:style>
+          <a:lnRef idx="1">
+            <a:schemeClr val="accent1"/>
+          </a:lnRef>
+          <a:fillRef idx="3">
+            <a:schemeClr val="accent1"/>
+          </a:fillRef>
+          <a:effectRef idx="2">
+            <a:schemeClr val="accent1"/>
+          </a:effectRef>
+          <a:fontRef idx="minor">
+            <a:schemeClr val="lt1"/>
+          </a:fontRef>
+        </p:style>
+        <p:txBody>
+          <a:bodyPr rtlCol="0" anchor="ctr"/>
+          <a:lstStyle/>
+          <a:p>
+            <a:pPr algn="ctr"/>
+          </a:p>
+        </p:txBody>
+      </p:sp>
+      <p:sp>
+        <p:nvSpPr>
+          <p:cNvPr id="6" name="TextBox 5"/>
+          <p:cNvSpPr txBox="1"/>
+          <p:nvPr/>
+        </p:nvSpPr>
+        <p:spPr>
+          <a:xfrm>
+            <a:off x="548626" y="6446520"/>
+            <a:ext cx="10180043" cy="240030"/>
+          </a:xfrm>
+          <a:prstGeom prst="rect">
+            <a:avLst/>
+          </a:prstGeom>
+          <a:noFill/>
+        </p:spPr>
+        <p:txBody>
+          <a:bodyPr wrap="square" anchor="t" lIns="0" rIns="0" tIns="0" bIns="0">
+            <a:spAutoFit/>
+          </a:bodyPr>
+          <a:lstStyle/>
+          <a:p>
+            <a:pPr algn="l">
+              <a:lnSpc>
+                <a:spcPct val="115000"/>
+              </a:lnSpc>
+            </a:pPr>
+            <a:r>
+              <a:rPr sz="900" b="0">
+                <a:solidFill>
+                  <a:srgbClr val="6B7280"/>
+                </a:solidFill>
+                <a:latin typeface="Pretendard"/>
+                <a:ea typeface="Pretendard"/>
+                <a:cs typeface="Pretendard"/>
+              </a:rPr>
+              <a:t>출처: 가상 데이터</a:t>
+            </a:r>
+          </a:p>
+        </p:txBody>
+      </p:sp>
+      <p:sp>
+        <p:nvSpPr>
+          <p:cNvPr id="7" name="TextBox 6"/>
+          <p:cNvSpPr txBox="1"/>
+          <p:nvPr/>
+        </p:nvSpPr>
+        <p:spPr>
+          <a:xfrm>
+            <a:off x="10728669" y="6446520"/>
+            <a:ext cx="914400" cy="240030"/>
+          </a:xfrm>
+          <a:prstGeom prst="rect">
+            <a:avLst/>
+          </a:prstGeom>
+          <a:noFill/>
+        </p:spPr>
+        <p:txBody>
+          <a:bodyPr wrap="square" anchor="t" lIns="0" rIns="0" tIns="0" bIns="0">
+            <a:spAutoFit/>
+          </a:bodyPr>
+          <a:lstStyle/>
+          <a:p>
+            <a:pPr algn="r">
+              <a:lnSpc>
+                <a:spcPct val="115000"/>
+              </a:lnSpc>
+            </a:pPr>
+            <a:r>
+              <a:rPr sz="900" b="0">
+                <a:solidFill>
+                  <a:srgbClr val="6B7280"/>
+                </a:solidFill>
+                <a:latin typeface="Pretendard"/>
+                <a:ea typeface="Pretendard"/>
+                <a:cs typeface="Pretendard"/>
+              </a:rPr>
+              <a:t>8</a:t>
+            </a:r>
+          </a:p>
+        </p:txBody>
+      </p:sp>
+      <p:sp>
+        <p:nvSpPr>
+          <p:cNvPr id="8" name="Rectangle 7"/>
+          <p:cNvSpPr/>
+          <p:nvPr/>
+        </p:nvSpPr>
+        <p:spPr>
+          <a:xfrm>
+            <a:off x="548626" y="1851660"/>
+            <a:ext cx="2567870" cy="2926080"/>
+          </a:xfrm>
+          <a:prstGeom prst="rect">
+            <a:avLst/>
+          </a:prstGeom>
+          <a:solidFill>
+            <a:srgbClr val="F3F5F8"/>
+          </a:solidFill>
+          <a:ln>
+            <a:noFill/>
+          </a:ln>
+          <a:effectLst/>
+        </p:spPr>
+        <p:style>
+          <a:lnRef idx="1">
+            <a:schemeClr val="accent1"/>
+          </a:lnRef>
+          <a:fillRef idx="3">
+            <a:schemeClr val="accent1"/>
+          </a:fillRef>
+          <a:effectRef idx="2">
+            <a:schemeClr val="accent1"/>
+          </a:effectRef>
+          <a:fontRef idx="minor">
+            <a:schemeClr val="lt1"/>
+          </a:fontRef>
+        </p:style>
+        <p:txBody>
+          <a:bodyPr rtlCol="0" anchor="ctr"/>
+          <a:lstStyle/>
+          <a:p>
+            <a:pPr algn="ctr"/>
+          </a:p>
+        </p:txBody>
+      </p:sp>
+      <p:sp>
+        <p:nvSpPr>
+          <p:cNvPr id="9" name="Rectangle 8"/>
+          <p:cNvSpPr/>
+          <p:nvPr/>
+        </p:nvSpPr>
+        <p:spPr>
+          <a:xfrm>
+            <a:off x="548626" y="1851660"/>
+            <a:ext cx="2567870" cy="57150"/>
+          </a:xfrm>
+          <a:prstGeom prst="rect">
+            <a:avLst/>
+          </a:prstGeom>
+          <a:solidFill>
+            <a:srgbClr val="E8833A"/>
+          </a:solidFill>
+          <a:ln>
+            <a:noFill/>
+          </a:ln>
+          <a:effectLst/>
+        </p:spPr>
+        <p:style>
+          <a:lnRef idx="1">
+            <a:schemeClr val="accent1"/>
+          </a:lnRef>
+          <a:fillRef idx="3">
+            <a:schemeClr val="accent1"/>
+          </a:fillRef>
+          <a:effectRef idx="2">
+            <a:schemeClr val="accent1"/>
+          </a:effectRef>
+          <a:fontRef idx="minor">
+            <a:schemeClr val="lt1"/>
+          </a:fontRef>
+        </p:style>
+        <p:txBody>
+          <a:bodyPr rtlCol="0" anchor="ctr"/>
+          <a:lstStyle/>
+          <a:p>
+            <a:pPr algn="ctr"/>
+          </a:p>
+        </p:txBody>
+      </p:sp>
+      <p:sp>
+        <p:nvSpPr>
+          <p:cNvPr id="10" name="TextBox 9"/>
+          <p:cNvSpPr txBox="1"/>
+          <p:nvPr/>
+        </p:nvSpPr>
+        <p:spPr>
+          <a:xfrm>
+            <a:off x="822946" y="2125980"/>
+            <a:ext cx="2019230" cy="1170432"/>
+          </a:xfrm>
+          <a:prstGeom prst="rect">
+            <a:avLst/>
+          </a:prstGeom>
+          <a:noFill/>
+        </p:spPr>
+        <p:txBody>
+          <a:bodyPr wrap="square" anchor="t" lIns="0" rIns="0" tIns="0" bIns="0">
+            <a:spAutoFit/>
+          </a:bodyPr>
+          <a:lstStyle/>
+          <a:p>
+            <a:pPr algn="l">
+              <a:lnSpc>
+                <a:spcPct val="115000"/>
+              </a:lnSpc>
+            </a:pPr>
+            <a:r>
+              <a:rPr sz="4000" b="1">
+                <a:solidFill>
+                  <a:srgbClr val="142A4D"/>
+                </a:solidFill>
+                <a:latin typeface="Pretendard"/>
+                <a:ea typeface="Pretendard"/>
+                <a:cs typeface="Pretendard"/>
+              </a:rPr>
+              <a:t>42곳</a:t>
+            </a:r>
+          </a:p>
+        </p:txBody>
+      </p:sp>
+      <p:sp>
+        <p:nvSpPr>
+          <p:cNvPr id="11" name="TextBox 10"/>
+          <p:cNvSpPr txBox="1"/>
+          <p:nvPr/>
+        </p:nvSpPr>
+        <p:spPr>
+          <a:xfrm>
+            <a:off x="822946" y="3314700"/>
+            <a:ext cx="2019230" cy="438912"/>
+          </a:xfrm>
+          <a:prstGeom prst="rect">
+            <a:avLst/>
+          </a:prstGeom>
+          <a:noFill/>
+        </p:spPr>
+        <p:txBody>
+          <a:bodyPr wrap="square" anchor="t" lIns="0" rIns="0" tIns="0" bIns="0">
+            <a:spAutoFit/>
+          </a:bodyPr>
+          <a:lstStyle/>
+          <a:p>
+            <a:pPr algn="l">
+              <a:lnSpc>
+                <a:spcPct val="115000"/>
+              </a:lnSpc>
+            </a:pPr>
+            <a:r>
+              <a:rPr sz="1600" b="1">
+                <a:solidFill>
+                  <a:srgbClr val="1E2329"/>
+                </a:solidFill>
+                <a:latin typeface="Pretendard"/>
+                <a:ea typeface="Pretendard"/>
+                <a:cs typeface="Pretendard"/>
+              </a:rPr>
+              <a:t>유료 고객</a:t>
+            </a:r>
+          </a:p>
+        </p:txBody>
+      </p:sp>
+      <p:sp>
+        <p:nvSpPr>
+          <p:cNvPr id="12" name="TextBox 11"/>
+          <p:cNvSpPr txBox="1"/>
+          <p:nvPr/>
+        </p:nvSpPr>
+        <p:spPr>
+          <a:xfrm>
+            <a:off x="822946" y="3782872"/>
+            <a:ext cx="2019230" cy="877824"/>
+          </a:xfrm>
+          <a:prstGeom prst="rect">
+            <a:avLst/>
+          </a:prstGeom>
+          <a:noFill/>
+        </p:spPr>
+        <p:txBody>
+          <a:bodyPr wrap="square" anchor="t" lIns="0" rIns="0" tIns="0" bIns="0">
+            <a:spAutoFit/>
+          </a:bodyPr>
+          <a:lstStyle/>
+          <a:p>
+            <a:pPr algn="l">
+              <a:lnSpc>
+                <a:spcPct val="115000"/>
+              </a:lnSpc>
+            </a:pPr>
+            <a:r>
+              <a:rPr sz="1200" b="0">
+                <a:solidFill>
+                  <a:srgbClr val="6B7280"/>
+                </a:solidFill>
+                <a:latin typeface="Pretendard"/>
+                <a:ea typeface="Pretendard"/>
+                <a:cs typeface="Pretendard"/>
+              </a:rPr>
+              <a:t>제조사 B2B 구독</a:t>
+            </a:r>
+          </a:p>
+        </p:txBody>
+      </p:sp>
+      <p:sp>
+        <p:nvSpPr>
+          <p:cNvPr id="13" name="Rectangle 12"/>
+          <p:cNvSpPr/>
+          <p:nvPr/>
+        </p:nvSpPr>
+        <p:spPr>
+          <a:xfrm>
+            <a:off x="3390816" y="1851660"/>
+            <a:ext cx="2567870" cy="2926080"/>
+          </a:xfrm>
+          <a:prstGeom prst="rect">
+            <a:avLst/>
+          </a:prstGeom>
+          <a:solidFill>
+            <a:srgbClr val="F3F5F8"/>
+          </a:solidFill>
+          <a:ln>
+            <a:noFill/>
+          </a:ln>
+          <a:effectLst/>
+        </p:spPr>
+        <p:style>
+          <a:lnRef idx="1">
+            <a:schemeClr val="accent1"/>
+          </a:lnRef>
+          <a:fillRef idx="3">
+            <a:schemeClr val="accent1"/>
+          </a:fillRef>
+          <a:effectRef idx="2">
+            <a:schemeClr val="accent1"/>
+          </a:effectRef>
+          <a:fontRef idx="minor">
+            <a:schemeClr val="lt1"/>
+          </a:fontRef>
+        </p:style>
+        <p:txBody>
+          <a:bodyPr rtlCol="0" anchor="ctr"/>
+          <a:lstStyle/>
+          <a:p>
+            <a:pPr algn="ctr"/>
+          </a:p>
+        </p:txBody>
+      </p:sp>
+      <p:sp>
+        <p:nvSpPr>
+          <p:cNvPr id="14" name="Rectangle 13"/>
+          <p:cNvSpPr/>
+          <p:nvPr/>
+        </p:nvSpPr>
+        <p:spPr>
+          <a:xfrm>
+            <a:off x="3390816" y="1851660"/>
+            <a:ext cx="2567870" cy="57150"/>
+          </a:xfrm>
+          <a:prstGeom prst="rect">
+            <a:avLst/>
+          </a:prstGeom>
+          <a:solidFill>
+            <a:srgbClr val="E8833A"/>
+          </a:solidFill>
+          <a:ln>
+            <a:noFill/>
+          </a:ln>
+          <a:effectLst/>
+        </p:spPr>
+        <p:style>
+          <a:lnRef idx="1">
+            <a:schemeClr val="accent1"/>
+          </a:lnRef>
+          <a:fillRef idx="3">
+            <a:schemeClr val="accent1"/>
+          </a:fillRef>
+          <a:effectRef idx="2">
+            <a:schemeClr val="accent1"/>
+          </a:effectRef>
+          <a:fontRef idx="minor">
+            <a:schemeClr val="lt1"/>
+          </a:fontRef>
+        </p:style>
+        <p:txBody>
+          <a:bodyPr rtlCol="0" anchor="ctr"/>
+          <a:lstStyle/>
+          <a:p>
+            <a:pPr algn="ctr"/>
+          </a:p>
+        </p:txBody>
+      </p:sp>
+      <p:sp>
+        <p:nvSpPr>
+          <p:cNvPr id="15" name="TextBox 14"/>
+          <p:cNvSpPr txBox="1"/>
+          <p:nvPr/>
+        </p:nvSpPr>
+        <p:spPr>
+          <a:xfrm>
+            <a:off x="3665136" y="2125980"/>
+            <a:ext cx="2019230" cy="1170432"/>
+          </a:xfrm>
+          <a:prstGeom prst="rect">
+            <a:avLst/>
+          </a:prstGeom>
+          <a:noFill/>
+        </p:spPr>
+        <p:txBody>
+          <a:bodyPr wrap="square" anchor="t" lIns="0" rIns="0" tIns="0" bIns="0">
+            <a:spAutoFit/>
+          </a:bodyPr>
+          <a:lstStyle/>
+          <a:p>
+            <a:pPr algn="l">
+              <a:lnSpc>
+                <a:spcPct val="115000"/>
+              </a:lnSpc>
+            </a:pPr>
+            <a:r>
+              <a:rPr sz="4000" b="1">
+                <a:solidFill>
+                  <a:srgbClr val="142A4D"/>
+                </a:solidFill>
+                <a:latin typeface="Pretendard"/>
+                <a:ea typeface="Pretendard"/>
+                <a:cs typeface="Pretendard"/>
+              </a:rPr>
+              <a:t>4.1억</a:t>
+            </a:r>
+          </a:p>
+        </p:txBody>
+      </p:sp>
+      <p:sp>
+        <p:nvSpPr>
+          <p:cNvPr id="16" name="TextBox 15"/>
+          <p:cNvSpPr txBox="1"/>
+          <p:nvPr/>
+        </p:nvSpPr>
+        <p:spPr>
+          <a:xfrm>
+            <a:off x="3665136" y="3314700"/>
+            <a:ext cx="2019230" cy="438912"/>
+          </a:xfrm>
+          <a:prstGeom prst="rect">
+            <a:avLst/>
+          </a:prstGeom>
+          <a:noFill/>
+        </p:spPr>
+        <p:txBody>
+          <a:bodyPr wrap="square" anchor="t" lIns="0" rIns="0" tIns="0" bIns="0">
+            <a:spAutoFit/>
+          </a:bodyPr>
+          <a:lstStyle/>
+          <a:p>
+            <a:pPr algn="l">
+              <a:lnSpc>
+                <a:spcPct val="115000"/>
+              </a:lnSpc>
+            </a:pPr>
+            <a:r>
+              <a:rPr sz="1600" b="1">
+                <a:solidFill>
+                  <a:srgbClr val="1E2329"/>
+                </a:solidFill>
+                <a:latin typeface="Pretendard"/>
+                <a:ea typeface="Pretendard"/>
+                <a:cs typeface="Pretendard"/>
+              </a:rPr>
+              <a:t>ARR</a:t>
+            </a:r>
+          </a:p>
+        </p:txBody>
+      </p:sp>
+      <p:sp>
+        <p:nvSpPr>
+          <p:cNvPr id="17" name="TextBox 16"/>
+          <p:cNvSpPr txBox="1"/>
+          <p:nvPr/>
+        </p:nvSpPr>
+        <p:spPr>
+          <a:xfrm>
+            <a:off x="3665136" y="3782872"/>
+            <a:ext cx="2019230" cy="877824"/>
+          </a:xfrm>
+          <a:prstGeom prst="rect">
+            <a:avLst/>
+          </a:prstGeom>
+          <a:noFill/>
+        </p:spPr>
+        <p:txBody>
+          <a:bodyPr wrap="square" anchor="t" lIns="0" rIns="0" tIns="0" bIns="0">
+            <a:spAutoFit/>
+          </a:bodyPr>
+          <a:lstStyle/>
+          <a:p>
+            <a:pPr algn="l">
+              <a:lnSpc>
+                <a:spcPct val="115000"/>
+              </a:lnSpc>
+            </a:pPr>
+            <a:r>
+              <a:rPr sz="1200" b="0">
+                <a:solidFill>
+                  <a:srgbClr val="6B7280"/>
+                </a:solidFill>
+                <a:latin typeface="Pretendard"/>
+                <a:ea typeface="Pretendard"/>
+                <a:cs typeface="Pretendard"/>
+              </a:rPr>
+              <a:t>2026.09 기준</a:t>
+            </a:r>
+          </a:p>
+        </p:txBody>
+      </p:sp>
+      <p:sp>
+        <p:nvSpPr>
+          <p:cNvPr id="18" name="Rectangle 17"/>
+          <p:cNvSpPr/>
+          <p:nvPr/>
+        </p:nvSpPr>
+        <p:spPr>
+          <a:xfrm>
+            <a:off x="6233006" y="1851660"/>
+            <a:ext cx="2567870" cy="2926080"/>
+          </a:xfrm>
+          <a:prstGeom prst="rect">
+            <a:avLst/>
+          </a:prstGeom>
+          <a:solidFill>
+            <a:srgbClr val="F3F5F8"/>
+          </a:solidFill>
+          <a:ln>
+            <a:noFill/>
+          </a:ln>
+          <a:effectLst/>
+        </p:spPr>
+        <p:style>
+          <a:lnRef idx="1">
+            <a:schemeClr val="accent1"/>
+          </a:lnRef>
+          <a:fillRef idx="3">
+            <a:schemeClr val="accent1"/>
+          </a:fillRef>
+          <a:effectRef idx="2">
+            <a:schemeClr val="accent1"/>
+          </a:effectRef>
+          <a:fontRef idx="minor">
+            <a:schemeClr val="lt1"/>
+          </a:fontRef>
+        </p:style>
+        <p:txBody>
+          <a:bodyPr rtlCol="0" anchor="ctr"/>
+          <a:lstStyle/>
+          <a:p>
+            <a:pPr algn="ctr"/>
+          </a:p>
+        </p:txBody>
+      </p:sp>
+      <p:sp>
+        <p:nvSpPr>
+          <p:cNvPr id="19" name="Rectangle 18"/>
+          <p:cNvSpPr/>
+          <p:nvPr/>
+        </p:nvSpPr>
+        <p:spPr>
+          <a:xfrm>
+            <a:off x="6233006" y="1851660"/>
+            <a:ext cx="2567870" cy="57150"/>
+          </a:xfrm>
+          <a:prstGeom prst="rect">
+            <a:avLst/>
+          </a:prstGeom>
+          <a:solidFill>
+            <a:srgbClr val="E8833A"/>
+          </a:solidFill>
+          <a:ln>
+            <a:noFill/>
+          </a:ln>
+          <a:effectLst/>
+        </p:spPr>
+        <p:style>
+          <a:lnRef idx="1">
+            <a:schemeClr val="accent1"/>
+          </a:lnRef>
+          <a:fillRef idx="3">
+            <a:schemeClr val="accent1"/>
+          </a:fillRef>
+          <a:effectRef idx="2">
+            <a:schemeClr val="accent1"/>
+          </a:effectRef>
+          <a:fontRef idx="minor">
+            <a:schemeClr val="lt1"/>
+          </a:fontRef>
+        </p:style>
+        <p:txBody>
+          <a:bodyPr rtlCol="0" anchor="ctr"/>
+          <a:lstStyle/>
+          <a:p>
+            <a:pPr algn="ctr"/>
+          </a:p>
+        </p:txBody>
+      </p:sp>
+      <p:sp>
+        <p:nvSpPr>
+          <p:cNvPr id="20" name="TextBox 19"/>
+          <p:cNvSpPr txBox="1"/>
+          <p:nvPr/>
+        </p:nvSpPr>
+        <p:spPr>
+          <a:xfrm>
+            <a:off x="6507326" y="2125980"/>
+            <a:ext cx="2019230" cy="1170432"/>
+          </a:xfrm>
+          <a:prstGeom prst="rect">
+            <a:avLst/>
+          </a:prstGeom>
+          <a:noFill/>
+        </p:spPr>
+        <p:txBody>
+          <a:bodyPr wrap="square" anchor="t" lIns="0" rIns="0" tIns="0" bIns="0">
+            <a:spAutoFit/>
+          </a:bodyPr>
+          <a:lstStyle/>
+          <a:p>
+            <a:pPr algn="l">
+              <a:lnSpc>
+                <a:spcPct val="115000"/>
+              </a:lnSpc>
+            </a:pPr>
+            <a:r>
+              <a:rPr sz="4000" b="1">
+                <a:solidFill>
+                  <a:srgbClr val="142A4D"/>
+                </a:solidFill>
+                <a:latin typeface="Pretendard"/>
+                <a:ea typeface="Pretendard"/>
+                <a:cs typeface="Pretendard"/>
+              </a:rPr>
+              <a:t>118%</a:t>
+            </a:r>
+          </a:p>
+        </p:txBody>
+      </p:sp>
+      <p:sp>
+        <p:nvSpPr>
+          <p:cNvPr id="21" name="TextBox 20"/>
+          <p:cNvSpPr txBox="1"/>
+          <p:nvPr/>
+        </p:nvSpPr>
+        <p:spPr>
+          <a:xfrm>
+            <a:off x="6507326" y="3314700"/>
+            <a:ext cx="2019230" cy="438912"/>
+          </a:xfrm>
+          <a:prstGeom prst="rect">
+            <a:avLst/>
+          </a:prstGeom>
+          <a:noFill/>
+        </p:spPr>
+        <p:txBody>
+          <a:bodyPr wrap="square" anchor="t" lIns="0" rIns="0" tIns="0" bIns="0">
+            <a:spAutoFit/>
+          </a:bodyPr>
+          <a:lstStyle/>
+          <a:p>
+            <a:pPr algn="l">
+              <a:lnSpc>
+                <a:spcPct val="115000"/>
+              </a:lnSpc>
+            </a:pPr>
+            <a:r>
+              <a:rPr sz="1600" b="1">
+                <a:solidFill>
+                  <a:srgbClr val="1E2329"/>
+                </a:solidFill>
+                <a:latin typeface="Pretendard"/>
+                <a:ea typeface="Pretendard"/>
+                <a:cs typeface="Pretendard"/>
+              </a:rPr>
+              <a:t>NRR</a:t>
+            </a:r>
+          </a:p>
+        </p:txBody>
+      </p:sp>
+      <p:sp>
+        <p:nvSpPr>
+          <p:cNvPr id="22" name="TextBox 21"/>
+          <p:cNvSpPr txBox="1"/>
+          <p:nvPr/>
+        </p:nvSpPr>
+        <p:spPr>
+          <a:xfrm>
+            <a:off x="6507326" y="3782872"/>
+            <a:ext cx="2019230" cy="877824"/>
+          </a:xfrm>
+          <a:prstGeom prst="rect">
+            <a:avLst/>
+          </a:prstGeom>
+          <a:noFill/>
+        </p:spPr>
+        <p:txBody>
+          <a:bodyPr wrap="square" anchor="t" lIns="0" rIns="0" tIns="0" bIns="0">
+            <a:spAutoFit/>
+          </a:bodyPr>
+          <a:lstStyle/>
+          <a:p>
+            <a:pPr algn="l">
+              <a:lnSpc>
+                <a:spcPct val="115000"/>
+              </a:lnSpc>
+            </a:pPr>
+            <a:r>
+              <a:rPr sz="1200" b="0">
+                <a:solidFill>
+                  <a:srgbClr val="D92D20"/>
+                </a:solidFill>
+                <a:latin typeface="Pretendard"/>
+                <a:ea typeface="Pretendard"/>
+                <a:cs typeface="Pretendard"/>
+              </a:rPr>
+              <a:t>[확인필요] 산식 재확인</a:t>
+            </a:r>
+          </a:p>
+        </p:txBody>
+      </p:sp>
+      <p:sp>
+        <p:nvSpPr>
+          <p:cNvPr id="23" name="Rectangle 22"/>
+          <p:cNvSpPr/>
+          <p:nvPr/>
+        </p:nvSpPr>
+        <p:spPr>
+          <a:xfrm>
+            <a:off x="9075196" y="1851660"/>
+            <a:ext cx="2567870" cy="2926080"/>
+          </a:xfrm>
+          <a:prstGeom prst="rect">
+            <a:avLst/>
+          </a:prstGeom>
+          <a:solidFill>
+            <a:srgbClr val="F3F5F8"/>
+          </a:solidFill>
+          <a:ln>
+            <a:noFill/>
+          </a:ln>
+          <a:effectLst/>
+        </p:spPr>
+        <p:style>
+          <a:lnRef idx="1">
+            <a:schemeClr val="accent1"/>
+          </a:lnRef>
+          <a:fillRef idx="3">
+            <a:schemeClr val="accent1"/>
+          </a:fillRef>
+          <a:effectRef idx="2">
+            <a:schemeClr val="accent1"/>
+          </a:effectRef>
+          <a:fontRef idx="minor">
+            <a:schemeClr val="lt1"/>
+          </a:fontRef>
+        </p:style>
+        <p:txBody>
+          <a:bodyPr rtlCol="0" anchor="ctr"/>
+          <a:lstStyle/>
+          <a:p>
+            <a:pPr algn="ctr"/>
+          </a:p>
+        </p:txBody>
+      </p:sp>
+      <p:sp>
+        <p:nvSpPr>
+          <p:cNvPr id="24" name="Rectangle 23"/>
+          <p:cNvSpPr/>
+          <p:nvPr/>
+        </p:nvSpPr>
+        <p:spPr>
+          <a:xfrm>
+            <a:off x="9075196" y="1851660"/>
+            <a:ext cx="2567870" cy="57150"/>
+          </a:xfrm>
+          <a:prstGeom prst="rect">
+            <a:avLst/>
+          </a:prstGeom>
+          <a:solidFill>
+            <a:srgbClr val="E8833A"/>
+          </a:solidFill>
+          <a:ln>
+            <a:noFill/>
+          </a:ln>
+          <a:effectLst/>
+        </p:spPr>
+        <p:style>
+          <a:lnRef idx="1">
+            <a:schemeClr val="accent1"/>
+          </a:lnRef>
+          <a:fillRef idx="3">
+            <a:schemeClr val="accent1"/>
+          </a:fillRef>
+          <a:effectRef idx="2">
+            <a:schemeClr val="accent1"/>
+          </a:effectRef>
+          <a:fontRef idx="minor">
+            <a:schemeClr val="lt1"/>
+          </a:fontRef>
+        </p:style>
+        <p:txBody>
+          <a:bodyPr rtlCol="0" anchor="ctr"/>
+          <a:lstStyle/>
+          <a:p>
+            <a:pPr algn="ctr"/>
+          </a:p>
+        </p:txBody>
+      </p:sp>
+      <p:sp>
+        <p:nvSpPr>
+          <p:cNvPr id="25" name="TextBox 24"/>
+          <p:cNvSpPr txBox="1"/>
+          <p:nvPr/>
+        </p:nvSpPr>
+        <p:spPr>
+          <a:xfrm>
+            <a:off x="9349516" y="2125980"/>
+            <a:ext cx="2019230" cy="1170432"/>
+          </a:xfrm>
+          <a:prstGeom prst="rect">
+            <a:avLst/>
+          </a:prstGeom>
+          <a:noFill/>
+        </p:spPr>
+        <p:txBody>
+          <a:bodyPr wrap="square" anchor="t" lIns="0" rIns="0" tIns="0" bIns="0">
+            <a:spAutoFit/>
+          </a:bodyPr>
+          <a:lstStyle/>
+          <a:p>
+            <a:pPr algn="l">
+              <a:lnSpc>
+                <a:spcPct val="115000"/>
+              </a:lnSpc>
+            </a:pPr>
+            <a:r>
+              <a:rPr sz="4000" b="1">
+                <a:solidFill>
+                  <a:srgbClr val="142A4D"/>
+                </a:solidFill>
+                <a:latin typeface="Pretendard"/>
+                <a:ea typeface="Pretendard"/>
+                <a:cs typeface="Pretendard"/>
+              </a:rPr>
+              <a:t>2.1%</a:t>
+            </a:r>
+          </a:p>
+        </p:txBody>
+      </p:sp>
+      <p:sp>
+        <p:nvSpPr>
+          <p:cNvPr id="26" name="TextBox 25"/>
+          <p:cNvSpPr txBox="1"/>
+          <p:nvPr/>
+        </p:nvSpPr>
+        <p:spPr>
+          <a:xfrm>
+            <a:off x="9349516" y="3314700"/>
+            <a:ext cx="2019230" cy="438912"/>
+          </a:xfrm>
+          <a:prstGeom prst="rect">
+            <a:avLst/>
+          </a:prstGeom>
+          <a:noFill/>
+        </p:spPr>
+        <p:txBody>
+          <a:bodyPr wrap="square" anchor="t" lIns="0" rIns="0" tIns="0" bIns="0">
+            <a:spAutoFit/>
+          </a:bodyPr>
+          <a:lstStyle/>
+          <a:p>
+            <a:pPr algn="l">
+              <a:lnSpc>
+                <a:spcPct val="115000"/>
+              </a:lnSpc>
+            </a:pPr>
+            <a:r>
+              <a:rPr sz="1600" b="1">
+                <a:solidFill>
+                  <a:srgbClr val="1E2329"/>
+                </a:solidFill>
+                <a:latin typeface="Pretendard"/>
+                <a:ea typeface="Pretendard"/>
+                <a:cs typeface="Pretendard"/>
+              </a:rPr>
+              <a:t>월 이탈률</a:t>
+            </a:r>
+          </a:p>
+        </p:txBody>
+      </p:sp>
+      <p:sp>
+        <p:nvSpPr>
+          <p:cNvPr id="27" name="TextBox 26"/>
+          <p:cNvSpPr txBox="1"/>
+          <p:nvPr/>
+        </p:nvSpPr>
+        <p:spPr>
+          <a:xfrm>
+            <a:off x="9349516" y="3782872"/>
+            <a:ext cx="2019230" cy="877824"/>
+          </a:xfrm>
+          <a:prstGeom prst="rect">
+            <a:avLst/>
+          </a:prstGeom>
+          <a:noFill/>
+        </p:spPr>
+        <p:txBody>
+          <a:bodyPr wrap="square" anchor="t" lIns="0" rIns="0" tIns="0" bIns="0">
+            <a:spAutoFit/>
+          </a:bodyPr>
+          <a:lstStyle/>
+          <a:p>
+            <a:pPr algn="l">
+              <a:lnSpc>
+                <a:spcPct val="115000"/>
+              </a:lnSpc>
+            </a:pPr>
+            <a:r>
+              <a:rPr sz="1200" b="0">
+                <a:solidFill>
+                  <a:srgbClr val="6B7280"/>
+                </a:solidFill>
+                <a:latin typeface="Pretendard"/>
+                <a:ea typeface="Pretendard"/>
+                <a:cs typeface="Pretendard"/>
+              </a:rPr>
+              <a:t>최근 6개월 평균</a:t>
+            </a:r>
+          </a:p>
+        </p:txBody>
+      </p:sp>
+    </p:spTree>
+  </p:cSld>
+  <p:clrMapOvr>
+    <a:masterClrMapping/>
+  </p:clrMapOvr>
+</p:sld>
+</file>
+
 <file path=ppt/slides/slide9.xml><?xml version="1.0" encoding="utf-8"?>
 <p:sld xmlns:a="http://schemas.openxmlformats.org/drawingml/2006/main" xmlns:p="http://schemas.openxmlformats.org/presentationml/2006/main" xmlns:r="http://schemas.openxmlformats.org/officeDocument/2006/relationships">
   <p:cSld>
@@ -9161,7 +9609,7 @@
                 <a:ea typeface="Pretendard"/>
                 <a:cs typeface="Pretendard"/>
               </a:rPr>
-              <a:t>02 솔루션</a:t>
+              <a:t>04 재무 계획</a:t>
             </a:r>
           </a:p>
         </p:txBody>
@@ -9202,7 +9650,7 @@
                 <a:ea typeface="Pretendard"/>
                 <a:cs typeface="Pretendard"/>
               </a:rPr>
-              <a:t>도입 전후 견적 프로세스</a:t>
+              <a:t>2028년 손익분기 도달 계획</a:t>
             </a:r>
           </a:p>
         </p:txBody>
@@ -9287,7 +9735,7 @@
                 <a:ea typeface="Pretendard"/>
                 <a:cs typeface="Pretendard"/>
               </a:rPr>
-              <a:t/>
+              <a:t>출처: 가상 데이터 · 추정</a:t>
             </a:r>
           </a:p>
         </p:txBody>
@@ -9333,50 +9781,24 @@
           </a:p>
         </p:txBody>
       </p:sp>
-      <p:sp>
-        <p:nvSpPr>
-          <p:cNvPr id="8" name="Rectangle 7"/>
-          <p:cNvSpPr/>
-          <p:nvPr/>
-        </p:nvSpPr>
-        <p:spPr>
-          <a:xfrm>
-            <a:off x="548626" y="1851660"/>
-            <a:ext cx="5364341" cy="548640"/>
-          </a:xfrm>
-          <a:prstGeom prst="rect">
-            <a:avLst/>
-          </a:prstGeom>
-          <a:solidFill>
-            <a:srgbClr val="6B7280"/>
-          </a:solidFill>
-          <a:ln>
-            <a:noFill/>
-          </a:ln>
-          <a:effectLst/>
-        </p:spPr>
-        <p:style>
-          <a:lnRef idx="1">
-            <a:schemeClr val="accent1"/>
-          </a:lnRef>
-          <a:fillRef idx="3">
-            <a:schemeClr val="accent1"/>
-          </a:fillRef>
-          <a:effectRef idx="2">
-            <a:schemeClr val="accent1"/>
-          </a:effectRef>
-          <a:fontRef idx="minor">
-            <a:schemeClr val="lt1"/>
-          </a:fontRef>
-        </p:style>
-        <p:txBody>
-          <a:bodyPr rtlCol="0" anchor="ctr"/>
-          <a:lstStyle/>
-          <a:p>
-            <a:pPr algn="ctr"/>
-          </a:p>
-        </p:txBody>
-      </p:sp>
+      <p:graphicFrame>
+        <p:nvGraphicFramePr>
+          <p:cNvPr id="8" name="Chart 7"/>
+          <p:cNvGraphicFramePr>
+            <a:graphicFrameLocks noGrp="1"/>
+          </p:cNvGraphicFramePr>
+          <p:nvPr/>
+        </p:nvGraphicFramePr>
+        <p:xfrm>
+          <a:off x="548626" y="1851660"/>
+          <a:ext cx="11094443" cy="4320540"/>
+        </p:xfrm>
+        <a:graphic>
+          <a:graphicData uri="http://schemas.openxmlformats.org/drawingml/2006/chart">
+            <c:chart xmlns:c="http://schemas.openxmlformats.org/drawingml/2006/chart" r:id="rId2"/>
+          </a:graphicData>
+        </a:graphic>
+      </p:graphicFrame>
       <p:sp>
         <p:nvSpPr>
           <p:cNvPr id="9" name="TextBox 8"/>
@@ -9385,8 +9807,8 @@
         </p:nvSpPr>
         <p:spPr>
           <a:xfrm>
-            <a:off x="777226" y="1851660"/>
-            <a:ext cx="4907141" cy="548640"/>
+            <a:off x="548626" y="1531620"/>
+            <a:ext cx="11094443" cy="274320"/>
           </a:xfrm>
           <a:prstGeom prst="rect">
             <a:avLst/>
@@ -9394,7 +9816,7 @@
           <a:noFill/>
         </p:spPr>
         <p:txBody>
-          <a:bodyPr wrap="square" anchor="ctr" lIns="0" rIns="0" tIns="0" bIns="0">
+          <a:bodyPr wrap="square" anchor="t" lIns="0" rIns="0" tIns="0" bIns="0">
             <a:spAutoFit/>
           </a:bodyPr>
           <a:lstStyle/>
@@ -9405,360 +9827,15 @@
               </a:lnSpc>
             </a:pPr>
             <a:r>
-              <a:rPr sz="1800" b="1">
+              <a:rPr sz="1000" b="0">
                 <a:solidFill>
-                  <a:srgbClr val="FFFFFF"/>
+                  <a:srgbClr val="6B7280"/>
                 </a:solidFill>
                 <a:latin typeface="Pretendard"/>
                 <a:ea typeface="Pretendard"/>
                 <a:cs typeface="Pretendard"/>
               </a:rPr>
-              <a:t>도입 전</a:t>
-            </a:r>
-          </a:p>
-        </p:txBody>
-      </p:sp>
-      <p:sp>
-        <p:nvSpPr>
-          <p:cNvPr id="10" name="Rectangle 9"/>
-          <p:cNvSpPr/>
-          <p:nvPr/>
-        </p:nvSpPr>
-        <p:spPr>
-          <a:xfrm>
-            <a:off x="548626" y="2400300"/>
-            <a:ext cx="5364341" cy="3771900"/>
-          </a:xfrm>
-          <a:prstGeom prst="rect">
-            <a:avLst/>
-          </a:prstGeom>
-          <a:solidFill>
-            <a:srgbClr val="F3F5F8"/>
-          </a:solidFill>
-          <a:ln>
-            <a:noFill/>
-          </a:ln>
-          <a:effectLst/>
-        </p:spPr>
-        <p:style>
-          <a:lnRef idx="1">
-            <a:schemeClr val="accent1"/>
-          </a:lnRef>
-          <a:fillRef idx="3">
-            <a:schemeClr val="accent1"/>
-          </a:fillRef>
-          <a:effectRef idx="2">
-            <a:schemeClr val="accent1"/>
-          </a:effectRef>
-          <a:fontRef idx="minor">
-            <a:schemeClr val="lt1"/>
-          </a:fontRef>
-        </p:style>
-        <p:txBody>
-          <a:bodyPr rtlCol="0" anchor="ctr"/>
-          <a:lstStyle/>
-          <a:p>
-            <a:pPr algn="ctr"/>
-          </a:p>
-        </p:txBody>
-      </p:sp>
-      <p:sp>
-        <p:nvSpPr>
-          <p:cNvPr id="11" name="TextBox 10"/>
-          <p:cNvSpPr txBox="1"/>
-          <p:nvPr/>
-        </p:nvSpPr>
-        <p:spPr>
-          <a:xfrm>
-            <a:off x="822946" y="2674620"/>
-            <a:ext cx="4815701" cy="3314700"/>
-          </a:xfrm>
-          <a:prstGeom prst="rect">
-            <a:avLst/>
-          </a:prstGeom>
-          <a:noFill/>
-        </p:spPr>
-        <p:txBody>
-          <a:bodyPr wrap="square" anchor="t" lIns="0" rIns="0" tIns="0" bIns="0">
-            <a:spAutoFit/>
-          </a:bodyPr>
-          <a:lstStyle/>
-          <a:p>
-            <a:pPr algn="l">
-              <a:lnSpc>
-                <a:spcPct val="115000"/>
-              </a:lnSpc>
-              <a:spcAft>
-                <a:spcPts val="960"/>
-              </a:spcAft>
-            </a:pPr>
-            <a:r>
-              <a:rPr sz="1600" b="0">
-                <a:solidFill>
-                  <a:srgbClr val="1E2329"/>
-                </a:solidFill>
-                <a:latin typeface="Pretendard"/>
-                <a:ea typeface="Pretendard"/>
-                <a:cs typeface="Pretendard"/>
-              </a:rPr>
-              <a:t>•  엑셀 단가표 수동 조회</a:t>
-            </a:r>
-          </a:p>
-          <a:p>
-            <a:pPr algn="l">
-              <a:lnSpc>
-                <a:spcPct val="115000"/>
-              </a:lnSpc>
-              <a:spcAft>
-                <a:spcPts val="960"/>
-              </a:spcAft>
-            </a:pPr>
-            <a:r>
-              <a:rPr sz="1600" b="0">
-                <a:solidFill>
-                  <a:srgbClr val="1E2329"/>
-                </a:solidFill>
-                <a:latin typeface="Pretendard"/>
-                <a:ea typeface="Pretendard"/>
-                <a:cs typeface="Pretendard"/>
-              </a:rPr>
-              <a:t>•  담당자 승인 대기 2일</a:t>
-            </a:r>
-          </a:p>
-          <a:p>
-            <a:pPr algn="l">
-              <a:lnSpc>
-                <a:spcPct val="115000"/>
-              </a:lnSpc>
-              <a:spcAft>
-                <a:spcPts val="960"/>
-              </a:spcAft>
-            </a:pPr>
-            <a:r>
-              <a:rPr sz="1600" b="0">
-                <a:solidFill>
-                  <a:srgbClr val="1E2329"/>
-                </a:solidFill>
-                <a:latin typeface="Pretendard"/>
-                <a:ea typeface="Pretendard"/>
-                <a:cs typeface="Pretendard"/>
-              </a:rPr>
-              <a:t>•  회신 평균 5일</a:t>
-            </a:r>
-          </a:p>
-        </p:txBody>
-      </p:sp>
-      <p:sp>
-        <p:nvSpPr>
-          <p:cNvPr id="12" name="Rectangle 11"/>
-          <p:cNvSpPr/>
-          <p:nvPr/>
-        </p:nvSpPr>
-        <p:spPr>
-          <a:xfrm>
-            <a:off x="6278727" y="1851660"/>
-            <a:ext cx="5364341" cy="548640"/>
-          </a:xfrm>
-          <a:prstGeom prst="rect">
-            <a:avLst/>
-          </a:prstGeom>
-          <a:solidFill>
-            <a:srgbClr val="142A4D"/>
-          </a:solidFill>
-          <a:ln>
-            <a:noFill/>
-          </a:ln>
-          <a:effectLst/>
-        </p:spPr>
-        <p:style>
-          <a:lnRef idx="1">
-            <a:schemeClr val="accent1"/>
-          </a:lnRef>
-          <a:fillRef idx="3">
-            <a:schemeClr val="accent1"/>
-          </a:fillRef>
-          <a:effectRef idx="2">
-            <a:schemeClr val="accent1"/>
-          </a:effectRef>
-          <a:fontRef idx="minor">
-            <a:schemeClr val="lt1"/>
-          </a:fontRef>
-        </p:style>
-        <p:txBody>
-          <a:bodyPr rtlCol="0" anchor="ctr"/>
-          <a:lstStyle/>
-          <a:p>
-            <a:pPr algn="ctr"/>
-          </a:p>
-        </p:txBody>
-      </p:sp>
-      <p:sp>
-        <p:nvSpPr>
-          <p:cNvPr id="13" name="TextBox 12"/>
-          <p:cNvSpPr txBox="1"/>
-          <p:nvPr/>
-        </p:nvSpPr>
-        <p:spPr>
-          <a:xfrm>
-            <a:off x="6507327" y="1851660"/>
-            <a:ext cx="4907141" cy="548640"/>
-          </a:xfrm>
-          <a:prstGeom prst="rect">
-            <a:avLst/>
-          </a:prstGeom>
-          <a:noFill/>
-        </p:spPr>
-        <p:txBody>
-          <a:bodyPr wrap="square" anchor="ctr" lIns="0" rIns="0" tIns="0" bIns="0">
-            <a:spAutoFit/>
-          </a:bodyPr>
-          <a:lstStyle/>
-          <a:p>
-            <a:pPr algn="l">
-              <a:lnSpc>
-                <a:spcPct val="115000"/>
-              </a:lnSpc>
-            </a:pPr>
-            <a:r>
-              <a:rPr sz="1800" b="1">
-                <a:solidFill>
-                  <a:srgbClr val="FFFFFF"/>
-                </a:solidFill>
-                <a:latin typeface="Pretendard"/>
-                <a:ea typeface="Pretendard"/>
-                <a:cs typeface="Pretendard"/>
-              </a:rPr>
-              <a:t>도입 후</a:t>
-            </a:r>
-          </a:p>
-        </p:txBody>
-      </p:sp>
-      <p:sp>
-        <p:nvSpPr>
-          <p:cNvPr id="14" name="Rectangle 13"/>
-          <p:cNvSpPr/>
-          <p:nvPr/>
-        </p:nvSpPr>
-        <p:spPr>
-          <a:xfrm>
-            <a:off x="6278727" y="2400300"/>
-            <a:ext cx="5364341" cy="3771900"/>
-          </a:xfrm>
-          <a:prstGeom prst="rect">
-            <a:avLst/>
-          </a:prstGeom>
-          <a:solidFill>
-            <a:srgbClr val="F3F5F8"/>
-          </a:solidFill>
-          <a:ln>
-            <a:noFill/>
-          </a:ln>
-          <a:effectLst/>
-        </p:spPr>
-        <p:style>
-          <a:lnRef idx="1">
-            <a:schemeClr val="accent1"/>
-          </a:lnRef>
-          <a:fillRef idx="3">
-            <a:schemeClr val="accent1"/>
-          </a:fillRef>
-          <a:effectRef idx="2">
-            <a:schemeClr val="accent1"/>
-          </a:effectRef>
-          <a:fontRef idx="minor">
-            <a:schemeClr val="lt1"/>
-          </a:fontRef>
-        </p:style>
-        <p:txBody>
-          <a:bodyPr rtlCol="0" anchor="ctr"/>
-          <a:lstStyle/>
-          <a:p>
-            <a:pPr algn="ctr"/>
-          </a:p>
-        </p:txBody>
-      </p:sp>
-      <p:sp>
-        <p:nvSpPr>
-          <p:cNvPr id="15" name="TextBox 14"/>
-          <p:cNvSpPr txBox="1"/>
-          <p:nvPr/>
-        </p:nvSpPr>
-        <p:spPr>
-          <a:xfrm>
-            <a:off x="6553047" y="2674620"/>
-            <a:ext cx="4815701" cy="3314700"/>
-          </a:xfrm>
-          <a:prstGeom prst="rect">
-            <a:avLst/>
-          </a:prstGeom>
-          <a:noFill/>
-        </p:spPr>
-        <p:txBody>
-          <a:bodyPr wrap="square" anchor="t" lIns="0" rIns="0" tIns="0" bIns="0">
-            <a:spAutoFit/>
-          </a:bodyPr>
-          <a:lstStyle/>
-          <a:p>
-            <a:pPr algn="l">
-              <a:lnSpc>
-                <a:spcPct val="115000"/>
-              </a:lnSpc>
-              <a:spcAft>
-                <a:spcPts val="960"/>
-              </a:spcAft>
-            </a:pPr>
-            <a:r>
-              <a:rPr sz="1600" b="0">
-                <a:solidFill>
-                  <a:srgbClr val="1E2329"/>
-                </a:solidFill>
-                <a:latin typeface="Pretendard"/>
-                <a:ea typeface="Pretendard"/>
-                <a:cs typeface="Pretendard"/>
-              </a:rPr>
-              <a:t>•  단가 자동 산출</a:t>
-            </a:r>
-          </a:p>
-          <a:p>
-            <a:pPr algn="l">
-              <a:lnSpc>
-                <a:spcPct val="115000"/>
-              </a:lnSpc>
-              <a:spcAft>
-                <a:spcPts val="960"/>
-              </a:spcAft>
-            </a:pPr>
-            <a:r>
-              <a:rPr sz="1600" b="0">
-                <a:solidFill>
-                  <a:srgbClr val="1E2329"/>
-                </a:solidFill>
-                <a:latin typeface="Pretendard"/>
-                <a:ea typeface="Pretendard"/>
-                <a:cs typeface="Pretendard"/>
-              </a:rPr>
-              <a:t>•  규칙 기반 자동 승인</a:t>
-            </a:r>
-          </a:p>
-          <a:p>
-            <a:pPr algn="l">
-              <a:lnSpc>
-                <a:spcPct val="115000"/>
-              </a:lnSpc>
-              <a:spcAft>
-                <a:spcPts val="960"/>
-              </a:spcAft>
-            </a:pPr>
-            <a:r>
-              <a:rPr sz="1600" b="0">
-                <a:solidFill>
-                  <a:srgbClr val="1E2329"/>
-                </a:solidFill>
-                <a:latin typeface="Pretendard"/>
-                <a:ea typeface="Pretendard"/>
-                <a:cs typeface="Pretendard"/>
-              </a:rPr>
-              <a:t>•  회신 평균 4시간</a:t>
+              <a:t>단위: 억원</a:t>
             </a:r>
           </a:p>
         </p:txBody>
